--- a/CADSCOM_PRESENTATION/CADSCOM_2026_Presentation.pptx
+++ b/CADSCOM_PRESENTATION/CADSCOM_2026_Presentation.pptx
@@ -517,13 +517,13 @@
           <a:lstStyle/>
           <a:p>
             <a:r>
-              <a:t>[~15 seconds]</a:t>
+              <a:t>[~20 seconds]</a:t>
             </a:r>
           </a:p>
           <a:p/>
           <a:p>
             <a:r>
-              <a:t>Good morning/afternoon, everyone. My name is Madeline Johnson, and I'm here with my co-authors Flint Million and Rajeev Bukralia from Minnesota State University, Mankato. Today I'm going to talk about how we can use data from musical scores to help singers find repertoire that actually fits their voice.</a:t>
+              <a:t>Good morning/afternoon, everyone. My name is Madeline Johnson, and I am currently pursuing a master's in data science here at Minnesota State University, Mankato. My undergraduate background is in vocal performance -- I hold a Bachelor of Music from Illinois Wesleyan University -- so this project sits right at the intersection of my two worlds. This work is co-authored with Flint Million and Rajeev Bukralia, and today I want to show you how we can use data from musical scores to help singers find repertoire that actually fits their voice.</a:t>
             </a:r>
           </a:p>
         </p:txBody>
@@ -599,7 +599,7 @@
           <a:p/>
           <a:p>
             <a:r>
-              <a:t>Here are the self-retrieval results. This figure shows Hit Rate at 1 -- how often the target song is ranked first -- and Mean Reciprocal Rank, which captures how high it ranks on average. On the left is Experiment 1, the compact 101-line library. The full model puts the right song first 76 percent of the time. Random guessing after the same range filter? About 6 percent. On the right is Experiment 2 with 1,655 lines. The full model still finds the right song first 55 percent of the time -- versus just 2 percent for random. And if we look at the top 5 instead of just the top 1, the system finds the target song 86 percent of the time. That's nearly 9 out of 10. These two experiments use different protocols and different candidate pools, so the drop from 76 to 55 percent is not purely a library-size effect. But the key takeaway is clear: the system massively outperforms random ordering in both cases.</a:t>
+              <a:t>This figure shows the self-retrieval results. The metric on the left of each panel is Hit Rate at 1 -- how often the target song is ranked first -- and Mean Reciprocal Rank on the right, which captures how high it ranks on average. In Experiment 1, the compact 101-line library, the full model puts the right song first 76 percent of the time. Random guessing after the same range filter gets about 6 percent. In Experiment 2 with 1,655 lines, the full model still finds the right song first 55 percent of the time -- versus just 2 percent for random. And if we look at the top 5 instead of just the top 1, the system finds the target song 86 percent of the time -- nearly 9 out of 10. These two experiments use different protocols and different candidate pools, so the drop from 76 to 55 percent is not purely a library-size effect. The key takeaway is clear: the system massively outperforms random ordering in both cases.</a:t>
             </a:r>
           </a:p>
         </p:txBody>
@@ -675,7 +675,7 @@
           <a:p/>
           <a:p>
             <a:r>
-              <a:t>Next: is the system stable? If a singer makes a small change to their preferences -- adds one favorite note or removes one avoid note -- does the whole ranking fall apart? We tested this with 580 one-note perturbations across 20 baseline profiles in the expanded library. We measured Kendall's tau, which compares two ranked lists. A tau of 1.0 means identical rankings; 0.0 means completely unrelated. Anything above 0.7 is considered strong agreement. Our full model achieved a mean tau of 0.84. The cosine-only model was 0.87, with overlapping confidence intervals. The random baseline was essentially zero, as expected. This means when a singer tweaks their preferences slightly, the recommendations stay largely the same. The system is stable and trustworthy.</a:t>
+              <a:t>The next thing we wanted to know was whether the system is stable -- whether a small change to preferences causes the rankings to shift dramatically. We tested this with 580 one-note perturbations across 20 baseline profiles in the expanded library. We measured stability using Kendall's tau, a statistic that compares two ranked lists. A tau of 1.0 means identical rankings; 0.0 means completely unrelated. Anything above 0.7 is considered strong agreement. Our full model achieved a mean tau of 0.84. The cosine-only model was 0.87, with overlapping confidence intervals. The random baseline was essentially zero, as expected. When a singer tweaks their preferences slightly, the recommendations stay largely the same. The system is stable and trustworthy.</a:t>
             </a:r>
           </a:p>
         </p:txBody>
@@ -751,7 +751,7 @@
           <a:p/>
           <a:p>
             <a:r>
-              <a:t>We also tested how sensitive the results are to the choice of alpha -- the parameter that controls how heavily we penalize avoided notes. We swept alpha from 0 to 1 in both experiments. As you can see, self-retrieval performance -- Hit Rate at 1 and MRR -- is largely flat across the entire range. The system isn't brittle to this choice. Stability does decrease slightly as alpha increases, which makes sense: a stronger avoid penalty creates more sensitivity to changes in avoid preferences. But even at alpha equals 1, tau stays above 0.82 -- well above the strong agreement threshold. We report alpha equals 0.5 as a balanced default: it gives singers meaningful control over their avoid preferences without making the rankings jittery.</a:t>
+              <a:t>We also tested how sensitive the results are to the choice of alpha -- the parameter that controls how heavily we penalize avoided notes. We swept alpha from 0 to 1 in both experiments. As you can see, self-retrieval performance -- Hit Rate at 1 and MRR -- is largely flat across the entire range. The system is not brittle to this choice. Stability does decrease slightly as alpha increases, which makes sense: a stronger avoid penalty creates more sensitivity to changes in avoid preferences. But even at alpha equals 1, tau stays above 0.82 -- well above the strong agreement threshold. We report alpha equals 0.5 as a balanced default: it gives singers meaningful control over their avoid preferences without making the rankings jittery.</a:t>
             </a:r>
           </a:p>
         </p:txBody>
@@ -827,7 +827,7 @@
           <a:p/>
           <a:p>
             <a:r>
-              <a:t>Finally, as an engineering sanity check, we verified that the formula is implemented exactly as designed. The identity residual -- the difference between the computed score and what the formula predicts -- is exactly zero. An OLS regression recovers the exact coefficients: cosine weight equals 1.0, avoid weight equals negative 0.5, R-squared equals 1.0. And all correlations go in the expected directions. Higher cosine similarity predicts a higher final score. Higher avoid penalty predicts a lower score. No hidden bugs, no rounding surprises. The math checks out.</a:t>
+              <a:t>As an engineering sanity check, we verified that the formula is implemented exactly as designed. The identity residual -- the difference between the computed score and what the formula predicts -- is exactly zero. An OLS regression recovers the exact coefficients: cosine weight equals 1.0, avoid weight equals negative 0.5, R-squared equals 1.0. All correlations go in the expected directions: higher cosine similarity predicts a higher final score, and higher avoid penalty predicts a lower score. No hidden bugs, no rounding surprises. The math checks out.</a:t>
             </a:r>
           </a:p>
         </p:txBody>
@@ -897,13 +897,13 @@
           <a:lstStyle/>
           <a:p>
             <a:r>
-              <a:t>[~45 seconds]</a:t>
+              <a:t>[~50 seconds]</a:t>
             </a:r>
           </a:p>
           <a:p/>
           <a:p>
             <a:r>
-              <a:t>So what does this all mean? This is a proof-of-concept that shows data science can bring objectivity to a domain where decisions are traditionally subjective -- and where bad decisions have real health consequences. For those of you working in recommendation systems or information retrieval, this demonstrates that familiar techniques -- cosine similarity, content-based filtering, offline evaluation metrics -- can work in a completely new domain. And it works in a cold-start setting with no collaborative filtering data, which is often the hardest case. I'd love for you to think about this: how might content-based recommendation techniques from YOUR work apply to creative domains like music, art, or design? The tools are the same -- the application is what makes it novel.</a:t>
+              <a:t>Let me step back and talk about what this means in practice. This is a proof-of-concept showing that data science can bring objectivity to a domain where decisions are traditionally subjective -- and where bad decisions have real health consequences. Think about the practical impact for a voice teacher. Right now, they recommend pieces from their own training and experience. But a query based on specific pitches -- 'find me pieces that live on these notes and avoid those' -- is far more granular than Fach. It could surface a piece the teacher has never encountered that turns out to be a perfect fit for their student's unique voice. For those of you in CS and data science, this also demonstrates that familiar tools -- cosine similarity, content-based filtering, offline evaluation -- can work in a completely new domain, and in a cold-start setting with no collaborative signal. I think there is a broader takeaway here for anyone working with content-based recommendation: these familiar techniques can open up entirely new domains, and I would welcome a conversation about where else they might apply.</a:t>
             </a:r>
           </a:p>
         </p:txBody>
@@ -979,7 +979,7 @@
           <a:p/>
           <a:p>
             <a:r>
-              <a:t>I want to be upfront about limitations, because honesty strengthens research. First, these are synthetic profiles, not real singer preferences. We haven't done a human study yet. Second, we only tested on one corpus of German and French art song. Opera, musical theatre, and popular song are untested. Third, we only model pitch and duration -- we don't account for dynamics, tempo, or text setting. For future work, we want to evaluate with real singers and their actual preferences, expand to more diverse repertoire, add richer musical features, and ultimately build an interactive tool that singers and voice teachers can use in practice.</a:t>
+              <a:t>I want to be upfront about limitations, because honesty strengthens research. First, these are synthetic profiles, not real singer preferences -- we have not done a human study yet. Second, we only tested on one corpus of German and French art song; opera, musical theatre, and popular song are untested. Third, we only model pitch and duration -- we do not account for dynamics, tempo, or text setting. For future work, we want to evaluate with real singers and their actual preferences, expand to more diverse repertoire, add richer musical features, and ultimately build an interactive tool that singers and voice teachers can use in practice.</a:t>
             </a:r>
           </a:p>
         </p:txBody>
@@ -1055,7 +1055,7 @@
           <a:p/>
           <a:p>
             <a:r>
-              <a:t>To wrap up: duration-weighted tessituragrams can rank vocal repertoire by fit -- and this is just the beginning. Next time a singer asks 'What should I sing?', data might have an answer. Thank you very much for your time. I'd be happy to take any questions.</a:t>
+              <a:t>To wrap up: duration-weighted tessituragrams can rank vocal repertoire by fit -- and this is just the beginning. Next time a singer asks 'What should I sing?', data might have an answer. Thank you very much for your time. I would be happy to take any questions.</a:t>
             </a:r>
           </a:p>
         </p:txBody>
@@ -1131,7 +1131,7 @@
           <a:p/>
           <a:p>
             <a:r>
-              <a:t>Let me start with a question. Have you ever wondered how a singer decides which songs are safe to sing? If you're not a singer, that might sound like an odd question. But for singers, choosing the wrong piece isn't just a matter of preference. It can lead to real vocal injury. Research shows that misalignment between a piece's demands and a singer's capabilities raises the risk of strain (Apfelbach, 2022; Phyland et al., 1999). In practice, singers and voice teachers rely on intuition, trial and error, or vocal classification systems that aren't consistently defined. So what if we could use data to make this process more objective and safer?</a:t>
+              <a:t>As a trained singer, one of the first things I learned is that choosing the wrong piece is not just an inconvenience -- it can lead to real vocal injury. For example, a singer with a naturally lower voice will usually not feel as comfortable spending long periods in a high range as a singer with a naturally higher voice. Research shows that when a piece's demands do not match a singer's capabilities, the risk of strain goes up significantly (Apfelbach, 2022; Phyland et al., 1999). In practice, singers and voice teachers rely on intuition, trial and error, or vocal classification systems that are not consistently defined. That is what motivated this research: using data to make the process of choosing repertoire more objective and safer.</a:t>
             </a:r>
           </a:p>
         </p:txBody>
@@ -1201,13 +1201,19 @@
           <a:lstStyle/>
           <a:p>
             <a:r>
-              <a:t>[~45 seconds]</a:t>
+              <a:t>[~55 seconds]</a:t>
             </a:r>
           </a:p>
           <a:p/>
           <a:p>
             <a:r>
-              <a:t>Here's the gap. Tools already exist that can analyze a song's tessitura -- where the voice sits in a piece. For example, a program called Tessa can extract a tessitura profile from a digital score. But these tools only work AFTER you've already picked a piece. They help you evaluate a choice you've made -- they don't help you discover new pieces that are likely to fit. And here's where my background matters. I was a vocal performance major before pursuing my master's in data science. I lived this problem as a singer. I know what it's like to pick a piece that doesn't sit well in your voice. And as a data scientist, I asked: can we build a system that recommends songs based on where they actually sit, not just their highest and lowest notes?</a:t>
+              <a:t>Today, singers mainly rely on two approaches. The first is filtering by range. Some databases let you filter by the notes in the vocal line -- you set a minimum and maximum pitch. That is useful, but it only tells you the extremes. A piece with one very high note at the climax looks the same as a piece that sits up high the entire time. Range tells you the boundaries, not where the voice actually lives.</a:t>
+            </a:r>
+          </a:p>
+          <a:p/>
+          <a:p>
+            <a:r>
+              <a:t>The second approach is Fach -- the system opera uses to categorize voices by range, weight, and color. Lyric soprano, dramatic mezzo, and so on. But Fach labels are not consistently defined across regions or pedagogical traditions (Schloneger et al., 2024), and many voices fall between categories -- which makes it hard to assign a single label. Fach gives you a broad category, not a profile tailored to a specific singer's unique voice. Neither approach captures where the voice actually spends its time -- and that distinction matters.</a:t>
             </a:r>
           </a:p>
         </p:txBody>
@@ -1277,13 +1283,19 @@
           <a:lstStyle/>
           <a:p>
             <a:r>
-              <a:t>[~60 seconds]</a:t>
+              <a:t>[~65 seconds]</a:t>
             </a:r>
           </a:p>
           <a:p/>
           <a:p>
             <a:r>
-              <a:t>Before we go further, let me explain a music concept that's central to this research: tessitura. If you look at a piece of vocal music, you can see the highest note and the lowest note -- that's the range. But range alone doesn't tell you where the voice SPENDS MOST OF ITS TIME. That's tessitura. A piece might have one very high note at the climax, but if the rest of the piece sits comfortably in the middle of the voice, it's very different from a piece that lives up high the entire time. Duration matters too: holding a high B-flat for eight beats is much more demanding than touching it for a sixteenth note. For those of you who aren't musicians, think of it like driving. What matters for the wear on your car isn't the farthest you've ever driven -- it's your daily commute. Tessitura is the voice's daily commute.</a:t>
+              <a:t>There is a concept that does capture where the voice spends its time: tessitura. Range tells you the highest and lowest notes, but tessitura tells you where the voice actually lives -- the pitches where it spends most of its time. A piece might touch its highest note once at the climax, but if it sits in the middle of the range for most of its duration, that is where the real demand is. What matters most is not the extremes -- it is where you spend the bulk of your time.</a:t>
+            </a:r>
+          </a:p>
+          <a:p/>
+          <a:p>
+            <a:r>
+              <a:t>A researcher named Stefan Thurmer formalized a way to represent tessitura visually. In 1988 he introduced the tessituragram -- a histogram of singing time per pitch. Titze, in 2008, refined this with duration weighting, meaning longer notes count more because sustaining a pitch is more demanding than a passing tone. The result is a fingerprint of where the voice spends its time in that piece. This is exactly what range and Fach miss -- the internal distribution of vocal demand. That raises a natural follow-up: whether any existing tools already use tessituragrams this way.</a:t>
             </a:r>
           </a:p>
         </p:txBody>
@@ -1353,13 +1365,19 @@
           <a:lstStyle/>
           <a:p>
             <a:r>
-              <a:t>[~45 seconds]</a:t>
+              <a:t>[~55 seconds]</a:t>
             </a:r>
           </a:p>
           <a:p/>
           <a:p>
             <a:r>
-              <a:t>So how do we capture tessitura computationally? With something called a tessituragram. It's essentially a fingerprint of a song. On one axis you have every pitch in the vocal line, and on the other you have how much total singing time is spent on that pitch, weighted by note duration. Longer notes count more because sustaining a pitch is more demanding than a passing tone. We parse digital sheet music -- MusicXML files -- using a toolkit called music21, and we build one of these profiles for every vocal line in our library. So the question becomes: can we use these fingerprints to match songs to singers?</a:t>
+              <a:t>There are tools that work with tessituragrams, but they are purely analytic. Tessa, developed by Apfelbach in 2022, extracts a tessituragram from a digital score and produces summary statistics. The Kassia Database -- a wonderful resource for art song by women composers -- displays a human-assessed tessitura for each entry. Both of these help you evaluate a piece after you have already found it. But neither one lets you use a tessituragram as a query -- to search for new pieces whose pitch distribution is likely to fit.</a:t>
+            </a:r>
+          </a:p>
+          <a:p/>
+          <a:p>
+            <a:r>
+              <a:t>The scale of the problem makes manual discovery impractical. The LiederNet Archive alone catalogs over 217,000 art-song settings. No voice teacher, no matter how experienced, can know all of that literature. Tessituragrams carry detailed information about a song's vocal demand -- but to our knowledge, no existing system uses them on the query side to recommend repertoire. That is the gap we wanted to explore.</a:t>
             </a:r>
           </a:p>
         </p:txBody>
@@ -1429,13 +1447,19 @@
           <a:lstStyle/>
           <a:p>
             <a:r>
-              <a:t>[~45 seconds]</a:t>
+              <a:t>[~50 seconds]</a:t>
             </a:r>
           </a:p>
           <a:p/>
           <a:p>
             <a:r>
-              <a:t>Here's the big picture of how the system works. It's a pipeline with five steps. First, the singer provides three inputs: their comfortable vocal range -- the lowest and highest notes they can sing -- their favorite pitches, and pitches they want to avoid. Second, we filter out any song whose written range goes beyond what the singer specified. Third, we construct an ideal pitch profile from those preferences -- basically a target fingerprint of what the perfect song would look like for this singer. Fourth, we score every remaining song by how closely its tessituragram matches that ideal, minus a penalty for time spent on avoided pitches. And finally, we return a ranked list from best match to worst. The singer tells us three things; we do the rest.</a:t>
+              <a:t>Let me walk you through the pipeline. First, a quick note on the data. We parse digital sheet music -- MusicXML files -- using a Python toolkit called music21, and for each vocal line we build a tessituragram: every pitch maps to its total duration in quarter-note beats. That is the input to the system.</a:t>
+            </a:r>
+          </a:p>
+          <a:p/>
+          <a:p>
+            <a:r>
+              <a:t>The pipeline has five steps. The singer provides three inputs: their comfortable vocal range, favorite pitches, and pitches to avoid. We filter out any song whose written range goes beyond what the singer specified. Then we construct an ideal pitch profile from those preferences. Every pitch in the singer's range starts with a small base weight, favorite pitches get a large boost, and avoided pitches drop to zero. The result is a target fingerprint of what the perfect song would look like for that singer. We score every remaining song by how closely its tessituragram matches that ideal, minus a penalty for time on avoided pitches. Finally, we return a ranked list from best match to worst.</a:t>
             </a:r>
           </a:p>
         </p:txBody>
@@ -1505,13 +1529,25 @@
           <a:lstStyle/>
           <a:p>
             <a:r>
-              <a:t>[~60 seconds]</a:t>
+              <a:t>[~70 seconds]</a:t>
             </a:r>
           </a:p>
           <a:p/>
           <a:p>
             <a:r>
-              <a:t>So let's look at exactly how the scoring works. The final score for each song is cosine similarity between that song's tessituragram and the singer's ideal profile, minus alpha times the avoid penalty. Let me break that down. Cosine similarity measures how closely a song's pitch-duration fingerprint aligns with what the singer wants. A score of 1.0 would be a perfect match in proportional shape. The avoid penalty is the proportion of the song's total singing duration that falls on notes the singer wants to avoid. Alpha controls the trade-off -- at 0.5, we're splitting the weight evenly. Think of it like a restaurant recommender. It finds dishes that match your taste preferences and then subtracts points for ingredients you don't like. Simple idea, but the question is: does it actually work? How do we know this produces good rankings?</a:t>
+              <a:t>Here is how the scoring works. First, recall how the ideal profile is built. We create a list of numbers -- one per pitch in the singer's range. Every pitch starts with a small base weight so it is not ignored entirely. Favorite pitches get a large boost on top of that, and avoided pitches are dropped to zero. The result is a profile that peaks at the singer's preferred pitches and has nothing where they want to avoid.</a:t>
+            </a:r>
+          </a:p>
+          <a:p/>
+          <a:p>
+            <a:r>
+              <a:t>Each song has its own list built the same way -- one number per pitch -- but from the actual score, showing how much singing time falls on each pitch. Cosine similarity then compares the pattern of these two lists. If both concentrate time on the same pitches in the same proportions, the score is high -- close to 1.0. It focuses on shape rather than total duration, so a short song and a long song that distribute time across pitches the same way score equally well. It is a standard tool for this kind of comparison in information retrieval, which is why we chose it.</a:t>
+            </a:r>
+          </a:p>
+          <a:p/>
+          <a:p>
+            <a:r>
+              <a:t>The avoid penalty is the proportion of the song's total singing duration that falls on notes the singer wants to avoid. Alpha controls the trade-off between rewarding good-fit pitches and penalizing avoided ones -- at 0.5, we split the weight evenly. The scoring function is straightforward in structure. To find out whether it actually produces good rankings, we ran two experiments on real musical data.</a:t>
             </a:r>
           </a:p>
         </p:txBody>
@@ -1581,13 +1617,13 @@
           <a:lstStyle/>
           <a:p>
             <a:r>
-              <a:t>[~45 seconds]</a:t>
+              <a:t>[~35 seconds]</a:t>
             </a:r>
           </a:p>
           <a:p/>
           <a:p>
             <a:r>
-              <a:t>To test this, we needed real musical data. We used the OpenScore Lieder Corpus -- a freely available, openly licensed collection of art songs. These are real scores by composers like Schubert, Clara and Robert Schumann, Debussy, and Fauré. We ran two experiments. The first used a compact library of 101 vocal lines, one per composition. The second used a much larger expanded library: 1,655 vocal lines drawn from 1,419 compositions -- about 16 times larger. Some compositions have multiple voice parts, like duets, so each vocal line is treated as its own item. These aren't made-up examples. These are real art songs that singers perform every day around the world.</a:t>
+              <a:t>We used the OpenScore Lieder Corpus -- a freely available, openly licensed collection of art songs. Conveniently, all of the composers have been dead long enough that copyright is not a concern. We ran two experiments. The first used a compact library of 101 vocal lines, one per composition. The second used a much larger expanded library: 1,655 vocal lines drawn from 1,419 compositions -- about 16 times larger. Some compositions have multiple voice parts, like duets, so each vocal line is treated as its own item.</a:t>
             </a:r>
           </a:p>
         </p:txBody>
@@ -1663,7 +1699,7 @@
           <a:p/>
           <a:p>
             <a:r>
-              <a:t>Now, we didn't have human judges rating songs for us. That's future work. Instead, we used a rigorous method called synthetic self-retrieval. Here's how it works. We pick a vocal line from the library. We build a singer profile directly from that line's own tessituragram: the range becomes the singer's range, the four pitches with the most singing time become the favorites, and the two pitches with the least become the avoids. Then we ask the system to rank all the remaining candidates and see where the original line ends up. If the system is working, it should rank that line very highly -- ideally first. We compared three models: the full model with the avoid penalty, cosine-only without the penalty, and a null baseline that just filters by range and then ranks randomly. So what did we find?</a:t>
+              <a:t>We did not have human judges rating songs for us -- that is future work. Instead, we used a rigorous method called synthetic self-retrieval. Here is how it works. We pick a vocal line from the library and build a singer profile directly from that line's own tessituragram: the range becomes the singer's range, the four pitches with the most singing time become the favorites, and the two pitches with the least become the avoids. Then we ask the system to rank all the remaining candidates and see where the original line ends up. If the system is working, it should rank that line very highly -- ideally first. We compared three models: the full model with the avoid penalty, cosine-only without the penalty, and a null baseline that just filters by range and then ranks randomly. Here is what we found.</a:t>
             </a:r>
           </a:p>
         </p:txBody>
@@ -4665,7 +4701,7 @@
     <p:bg>
       <p:bgPr>
         <a:solidFill>
-          <a:srgbClr val="6B1D2A"/>
+          <a:srgbClr val="0B1F3B"/>
         </a:solidFill>
         <a:effectLst/>
       </p:bgPr>
@@ -4692,7 +4728,7 @@
             <a:avLst/>
           </a:prstGeom>
           <a:solidFill>
-            <a:srgbClr val="C59B3F"/>
+            <a:srgbClr val="FF5D7A"/>
           </a:solidFill>
           <a:ln>
             <a:noFill/>
@@ -4735,7 +4771,7 @@
             <a:avLst/>
           </a:prstGeom>
           <a:solidFill>
-            <a:srgbClr val="C59B3F"/>
+            <a:srgbClr val="FF5D7A"/>
           </a:solidFill>
           <a:ln>
             <a:noFill/>
@@ -4825,7 +4861,7 @@
             <a:r>
               <a:rPr sz="2400" b="0" i="0">
                 <a:solidFill>
-                  <a:srgbClr val="F5E6C4"/>
+                  <a:srgbClr val="F4F6F8"/>
                 </a:solidFill>
                 <a:latin typeface="Calibri"/>
               </a:rPr>
@@ -4860,7 +4896,7 @@
             <a:r>
               <a:rPr sz="2000" b="0" i="1">
                 <a:solidFill>
-                  <a:srgbClr val="F5E6C4"/>
+                  <a:srgbClr val="F4F6F8"/>
                 </a:solidFill>
                 <a:latin typeface="Calibri"/>
               </a:rPr>
@@ -4895,7 +4931,7 @@
             <a:r>
               <a:rPr sz="2000" b="1" i="0">
                 <a:solidFill>
-                  <a:srgbClr val="C59B3F"/>
+                  <a:srgbClr val="FF5D7A"/>
                 </a:solidFill>
                 <a:latin typeface="Calibri"/>
               </a:rPr>
@@ -4918,7 +4954,7 @@
     <p:bg>
       <p:bgPr>
         <a:solidFill>
-          <a:srgbClr val="FDF6EC"/>
+          <a:srgbClr val="FFFFFF"/>
         </a:solidFill>
         <a:effectLst/>
       </p:bgPr>
@@ -4945,7 +4981,7 @@
             <a:avLst/>
           </a:prstGeom>
           <a:solidFill>
-            <a:srgbClr val="6B1D2A"/>
+            <a:srgbClr val="0B1F3B"/>
           </a:solidFill>
           <a:ln>
             <a:noFill/>
@@ -5023,7 +5059,7 @@
             <a:avLst/>
           </a:prstGeom>
           <a:solidFill>
-            <a:srgbClr val="C59B3F"/>
+            <a:srgbClr val="FF5D7A"/>
           </a:solidFill>
           <a:ln>
             <a:noFill/>
@@ -5090,7 +5126,7 @@
             <a:avLst/>
           </a:prstGeom>
           <a:solidFill>
-            <a:srgbClr val="6B1D2A"/>
+            <a:srgbClr val="0B1F3B"/>
           </a:solidFill>
           <a:ln>
             <a:noFill/>
@@ -5126,7 +5162,7 @@
                 </a:solidFill>
                 <a:latin typeface="Calibri"/>
               </a:rPr>
-              <a:t>Compact library:  HR@1 = 76%  vs. 6% random   |   Expanded library:  HR@1 = 55%  vs. 2% random</a:t>
+              <a:t>Compact HR@1 = 76%  vs. 6% random   |   Expanded HR@1 = 55%  vs. 2% random</a:t>
             </a:r>
           </a:p>
           <a:p>
@@ -5142,7 +5178,7 @@
                 </a:solidFill>
                 <a:latin typeface="Calibri"/>
               </a:rPr>
-              <a:t>Expanded HR@5 = 86%  —  the target song lands in the top 5 nearly 9 times out of 10.</a:t>
+              <a:t>Expanded HR@5 = 86%  —  target in top 5 nearly 9/10 times.</a:t>
             </a:r>
           </a:p>
         </p:txBody>
@@ -5161,7 +5197,7 @@
     <p:bg>
       <p:bgPr>
         <a:solidFill>
-          <a:srgbClr val="FDF6EC"/>
+          <a:srgbClr val="FFFFFF"/>
         </a:solidFill>
         <a:effectLst/>
       </p:bgPr>
@@ -5188,7 +5224,7 @@
             <a:avLst/>
           </a:prstGeom>
           <a:solidFill>
-            <a:srgbClr val="6B1D2A"/>
+            <a:srgbClr val="0B1F3B"/>
           </a:solidFill>
           <a:ln>
             <a:noFill/>
@@ -5266,7 +5302,7 @@
             <a:avLst/>
           </a:prstGeom>
           <a:solidFill>
-            <a:srgbClr val="C59B3F"/>
+            <a:srgbClr val="FF5D7A"/>
           </a:solidFill>
           <a:ln>
             <a:noFill/>
@@ -5348,11 +5384,11 @@
             <a:r>
               <a:rPr sz="2000" b="0" i="0">
                 <a:solidFill>
-                  <a:srgbClr val="2D2D2D"/>
-                </a:solidFill>
-                <a:latin typeface="Calibri"/>
-              </a:rPr>
-              <a:t>  •  Mean Kendall’s τ = 0.84–0.85 (strong agreement; threshold = 0.7).</a:t>
+                  <a:srgbClr val="1A1A1A"/>
+                </a:solidFill>
+                <a:latin typeface="Calibri"/>
+              </a:rPr>
+              <a:t>  •  Mean Kendall’s τ = 0.84–0.85  (threshold = 0.7).</a:t>
             </a:r>
           </a:p>
           <a:p>
@@ -5364,11 +5400,11 @@
             <a:r>
               <a:rPr sz="2000" b="0" i="0">
                 <a:solidFill>
-                  <a:srgbClr val="2D2D2D"/>
-                </a:solidFill>
-                <a:latin typeface="Calibri"/>
-              </a:rPr>
-              <a:t>  •  Small changes to preferences → small changes in rankings.</a:t>
+                  <a:srgbClr val="1A1A1A"/>
+                </a:solidFill>
+                <a:latin typeface="Calibri"/>
+              </a:rPr>
+              <a:t>  •  Small preference changes → small ranking changes.</a:t>
             </a:r>
           </a:p>
           <a:p>
@@ -5380,11 +5416,11 @@
             <a:r>
               <a:rPr sz="2000" b="0" i="0">
                 <a:solidFill>
-                  <a:srgbClr val="2D2D2D"/>
-                </a:solidFill>
-                <a:latin typeface="Calibri"/>
-              </a:rPr>
-              <a:t>  •  The system is stable and trustworthy.</a:t>
+                  <a:srgbClr val="1A1A1A"/>
+                </a:solidFill>
+                <a:latin typeface="Calibri"/>
+              </a:rPr>
+              <a:t>  •  Stable and trustworthy.</a:t>
             </a:r>
           </a:p>
         </p:txBody>
@@ -5403,7 +5439,7 @@
     <p:bg>
       <p:bgPr>
         <a:solidFill>
-          <a:srgbClr val="FDF6EC"/>
+          <a:srgbClr val="FFFFFF"/>
         </a:solidFill>
         <a:effectLst/>
       </p:bgPr>
@@ -5430,7 +5466,7 @@
             <a:avLst/>
           </a:prstGeom>
           <a:solidFill>
-            <a:srgbClr val="6B1D2A"/>
+            <a:srgbClr val="0B1F3B"/>
           </a:solidFill>
           <a:ln>
             <a:noFill/>
@@ -5508,7 +5544,7 @@
             <a:avLst/>
           </a:prstGeom>
           <a:solidFill>
-            <a:srgbClr val="C59B3F"/>
+            <a:srgbClr val="FF5D7A"/>
           </a:solidFill>
           <a:ln>
             <a:noFill/>
@@ -5590,11 +5626,11 @@
             <a:r>
               <a:rPr sz="2000" b="0" i="0">
                 <a:solidFill>
-                  <a:srgbClr val="2D2D2D"/>
-                </a:solidFill>
-                <a:latin typeface="Calibri"/>
-              </a:rPr>
-              <a:t>  •  Self-retrieval performance is largely flat across α values (0 to 1).</a:t>
+                  <a:srgbClr val="1A1A1A"/>
+                </a:solidFill>
+                <a:latin typeface="Calibri"/>
+              </a:rPr>
+              <a:t>  •  Performance flat across α = 0–1.</a:t>
             </a:r>
           </a:p>
           <a:p>
@@ -5606,11 +5642,11 @@
             <a:r>
               <a:rPr sz="2000" b="0" i="0">
                 <a:solidFill>
-                  <a:srgbClr val="2D2D2D"/>
-                </a:solidFill>
-                <a:latin typeface="Calibri"/>
-              </a:rPr>
-              <a:t>  •  Stability stays strong: τ ≥ 0.82 even at α = 1.0.</a:t>
+                  <a:srgbClr val="1A1A1A"/>
+                </a:solidFill>
+                <a:latin typeface="Calibri"/>
+              </a:rPr>
+              <a:t>  •  Stability holds: τ ≥ 0.82 even at α = 1.0.</a:t>
             </a:r>
           </a:p>
           <a:p>
@@ -5622,11 +5658,11 @@
             <a:r>
               <a:rPr sz="2000" b="0" i="0">
                 <a:solidFill>
-                  <a:srgbClr val="2D2D2D"/>
-                </a:solidFill>
-                <a:latin typeface="Calibri"/>
-              </a:rPr>
-              <a:t>  •  α = 0.5 is a balanced default — meaningful avoid control without instability.</a:t>
+                  <a:srgbClr val="1A1A1A"/>
+                </a:solidFill>
+                <a:latin typeface="Calibri"/>
+              </a:rPr>
+              <a:t>  •  α = 0.5 balances avoid control and stability.</a:t>
             </a:r>
           </a:p>
         </p:txBody>
@@ -5645,7 +5681,7 @@
     <p:bg>
       <p:bgPr>
         <a:solidFill>
-          <a:srgbClr val="FDF6EC"/>
+          <a:srgbClr val="FFFFFF"/>
         </a:solidFill>
         <a:effectLst/>
       </p:bgPr>
@@ -5672,7 +5708,7 @@
             <a:avLst/>
           </a:prstGeom>
           <a:solidFill>
-            <a:srgbClr val="6B1D2A"/>
+            <a:srgbClr val="0B1F3B"/>
           </a:solidFill>
           <a:ln>
             <a:noFill/>
@@ -5750,7 +5786,7 @@
             <a:avLst/>
           </a:prstGeom>
           <a:solidFill>
-            <a:srgbClr val="C59B3F"/>
+            <a:srgbClr val="FF5D7A"/>
           </a:solidFill>
           <a:ln>
             <a:noFill/>
@@ -5808,12 +5844,11 @@
             <a:r>
               <a:rPr sz="2200" b="0" i="0">
                 <a:solidFill>
-                  <a:srgbClr val="2D2D2D"/>
-                </a:solidFill>
-                <a:latin typeface="Calibri"/>
-              </a:rPr>
-              <a:t>  •  Identity check:  max |final − (cos − 0.5 × avoid)| = 0
-The formula is implemented with zero numerical error.</a:t>
+                  <a:srgbClr val="1A1A1A"/>
+                </a:solidFill>
+                <a:latin typeface="Calibri"/>
+              </a:rPr>
+              <a:t>  •  Identity residual = 0  —  zero numerical error.</a:t>
             </a:r>
           </a:p>
           <a:p>
@@ -5825,12 +5860,12 @@
             <a:r>
               <a:rPr sz="2200" b="0" i="0">
                 <a:solidFill>
-                  <a:srgbClr val="2D2D2D"/>
-                </a:solidFill>
-                <a:latin typeface="Calibri"/>
-              </a:rPr>
-              <a:t>  •  OLS regression recovers exact coefficients:
-cos weight = 1.0,  avoid weight = −0.5,  R² = 1.0.</a:t>
+                  <a:srgbClr val="1A1A1A"/>
+                </a:solidFill>
+                <a:latin typeface="Calibri"/>
+              </a:rPr>
+              <a:t>  •  OLS recovers exact coefficients:
+cos = 1.0,  avoid = −0.5,  R² = 1.0.</a:t>
             </a:r>
           </a:p>
           <a:p>
@@ -5842,12 +5877,12 @@
             <a:r>
               <a:rPr sz="2200" b="0" i="0">
                 <a:solidFill>
-                  <a:srgbClr val="2D2D2D"/>
-                </a:solidFill>
-                <a:latin typeface="Calibri"/>
-              </a:rPr>
-              <a:t>  •  Spearman correlations all in expected directions:
-ρ(final, cos) = +0.99   |   ρ(final, avoid) = −0.32   |   ρ(cos, fav_overlap) = +0.92</a:t>
+                  <a:srgbClr val="1A1A1A"/>
+                </a:solidFill>
+                <a:latin typeface="Calibri"/>
+              </a:rPr>
+              <a:t>  •  Spearman ρ in expected directions:
+(final, cos) +0.99  |  (final, avoid) −0.32  |  (cos, fav) +0.92</a:t>
             </a:r>
           </a:p>
           <a:p>
@@ -5859,11 +5894,11 @@
             <a:r>
               <a:rPr sz="2200" b="0" i="0">
                 <a:solidFill>
-                  <a:srgbClr val="2D2D2D"/>
-                </a:solidFill>
-                <a:latin typeface="Calibri"/>
-              </a:rPr>
-              <a:t>  •  No hidden bugs.  No rounding surprises.  The math checks out.</a:t>
+                  <a:srgbClr val="1A1A1A"/>
+                </a:solidFill>
+                <a:latin typeface="Calibri"/>
+              </a:rPr>
+              <a:t>  •  The math checks out.</a:t>
             </a:r>
           </a:p>
         </p:txBody>
@@ -5882,7 +5917,7 @@
     <p:bg>
       <p:bgPr>
         <a:solidFill>
-          <a:srgbClr val="FDF6EC"/>
+          <a:srgbClr val="FFFFFF"/>
         </a:solidFill>
         <a:effectLst/>
       </p:bgPr>
@@ -5909,7 +5944,7 @@
             <a:avLst/>
           </a:prstGeom>
           <a:solidFill>
-            <a:srgbClr val="6B1D2A"/>
+            <a:srgbClr val="0B1F3B"/>
           </a:solidFill>
           <a:ln>
             <a:noFill/>
@@ -5987,7 +6022,7 @@
             <a:avLst/>
           </a:prstGeom>
           <a:solidFill>
-            <a:srgbClr val="C59B3F"/>
+            <a:srgbClr val="FF5D7A"/>
           </a:solidFill>
           <a:ln>
             <a:noFill/>
@@ -6024,7 +6059,7 @@
         <p:spPr>
           <a:xfrm>
             <a:off x="685800" y="1371600"/>
-            <a:ext cx="10789920" cy="2560320"/>
+            <a:ext cx="10789920" cy="2743200"/>
           </a:xfrm>
           <a:prstGeom prst="rect">
             <a:avLst/>
@@ -6045,12 +6080,12 @@
             <a:r>
               <a:rPr sz="2200" b="0" i="0">
                 <a:solidFill>
-                  <a:srgbClr val="2D2D2D"/>
-                </a:solidFill>
-                <a:latin typeface="Calibri"/>
-              </a:rPr>
-              <a:t>  •  Proof-of-concept: data science can make vocal health decisions
-safer and more objective.</a:t>
+                  <a:srgbClr val="1A1A1A"/>
+                </a:solidFill>
+                <a:latin typeface="Calibri"/>
+              </a:rPr>
+              <a:t>  •  Data science can make vocal health
+decisions safer and more objective.</a:t>
             </a:r>
           </a:p>
           <a:p>
@@ -6062,12 +6097,12 @@
             <a:r>
               <a:rPr sz="2200" b="0" i="0">
                 <a:solidFill>
-                  <a:srgbClr val="2D2D2D"/>
-                </a:solidFill>
-                <a:latin typeface="Calibri"/>
-              </a:rPr>
-              <a:t>  •  Familiar techniques applied to a novel domain:
-cosine similarity, cold-start recommendation, offline evaluation.</a:t>
+                  <a:srgbClr val="1A1A1A"/>
+                </a:solidFill>
+                <a:latin typeface="Calibri"/>
+              </a:rPr>
+              <a:t>  •  Pitch-level queries surpass Fach —
+surface pieces a teacher may never find.</a:t>
             </a:r>
           </a:p>
           <a:p>
@@ -6079,12 +6114,12 @@
             <a:r>
               <a:rPr sz="2200" b="0" i="0">
                 <a:solidFill>
-                  <a:srgbClr val="2D2D2D"/>
-                </a:solidFill>
-                <a:latin typeface="Calibri"/>
-              </a:rPr>
-              <a:t>  •  Content-based methods can work even without user-interaction data
-(cold-start / no collaborative signal).</a:t>
+                  <a:srgbClr val="1A1A1A"/>
+                </a:solidFill>
+                <a:latin typeface="Calibri"/>
+              </a:rPr>
+              <a:t>  •  Familiar techniques, novel domain:
+cosine similarity, cold-start, offline eval.</a:t>
             </a:r>
           </a:p>
         </p:txBody>
@@ -6097,7 +6132,7 @@
         </p:nvSpPr>
         <p:spPr>
           <a:xfrm>
-            <a:off x="1097280" y="4206240"/>
+            <a:off x="1097280" y="4389120"/>
             <a:ext cx="9966960" cy="3200400"/>
           </a:xfrm>
           <a:prstGeom prst="rect">
@@ -6115,12 +6150,12 @@
             <a:r>
               <a:rPr sz="3400" b="0" i="1">
                 <a:solidFill>
-                  <a:srgbClr val="6B1D2A"/>
-                </a:solidFill>
-                <a:latin typeface="Calibri"/>
-              </a:rPr>
-              <a:t>“How might content-based recommendation techniques
-from your own work apply to creative domains like music?”</a:t>
+                  <a:srgbClr val="0B1F3B"/>
+                </a:solidFill>
+                <a:latin typeface="Calibri"/>
+              </a:rPr>
+              <a:t>“How might content-based recommendations
+apply to creative domains like music?”</a:t>
             </a:r>
           </a:p>
         </p:txBody>
@@ -6139,7 +6174,7 @@
     <p:bg>
       <p:bgPr>
         <a:solidFill>
-          <a:srgbClr val="FDF6EC"/>
+          <a:srgbClr val="FFFFFF"/>
         </a:solidFill>
         <a:effectLst/>
       </p:bgPr>
@@ -6166,7 +6201,7 @@
             <a:avLst/>
           </a:prstGeom>
           <a:solidFill>
-            <a:srgbClr val="6B1D2A"/>
+            <a:srgbClr val="0B1F3B"/>
           </a:solidFill>
           <a:ln>
             <a:noFill/>
@@ -6244,7 +6279,7 @@
             <a:avLst/>
           </a:prstGeom>
           <a:solidFill>
-            <a:srgbClr val="C59B3F"/>
+            <a:srgbClr val="FF5D7A"/>
           </a:solidFill>
           <a:ln>
             <a:noFill/>
@@ -6302,7 +6337,7 @@
             <a:r>
               <a:rPr sz="2200" b="0" i="0">
                 <a:solidFill>
-                  <a:srgbClr val="2D2D2D"/>
+                  <a:srgbClr val="1A1A1A"/>
                 </a:solidFill>
                 <a:latin typeface="Calibri"/>
               </a:rPr>
@@ -6318,12 +6353,12 @@
             <a:r>
               <a:rPr sz="2200" b="0" i="0">
                 <a:solidFill>
-                  <a:srgbClr val="2D2D2D"/>
-                </a:solidFill>
-                <a:latin typeface="Calibri"/>
-              </a:rPr>
-              <a:t>  •  One corpus (German &amp; French art song); opera, musical theatre,
-and popular song are untested.</a:t>
+                  <a:srgbClr val="1A1A1A"/>
+                </a:solidFill>
+                <a:latin typeface="Calibri"/>
+              </a:rPr>
+              <a:t>  •  One corpus (German &amp; French art song);
+opera, theatre, pop untested.</a:t>
             </a:r>
           </a:p>
           <a:p>
@@ -6335,11 +6370,12 @@
             <a:r>
               <a:rPr sz="2200" b="0" i="0">
                 <a:solidFill>
-                  <a:srgbClr val="2D2D2D"/>
-                </a:solidFill>
-                <a:latin typeface="Calibri"/>
-              </a:rPr>
-              <a:t>  •  Pitch and duration only — dynamics, tempo, and text omitted.</a:t>
+                  <a:srgbClr val="1A1A1A"/>
+                </a:solidFill>
+                <a:latin typeface="Calibri"/>
+              </a:rPr>
+              <a:t>  •  Pitch + duration only — dynamics,
+tempo, text omitted.</a:t>
             </a:r>
           </a:p>
           <a:p>
@@ -6351,12 +6387,12 @@
             <a:r>
               <a:rPr sz="2200" b="0" i="0">
                 <a:solidFill>
-                  <a:srgbClr val="2D2D2D"/>
-                </a:solidFill>
-                <a:latin typeface="Calibri"/>
-              </a:rPr>
-              <a:t>  •  Future:  real singer preferences  |  diverse repertoire
-richer features  |  interactive recommendation tool.</a:t>
+                  <a:srgbClr val="1A1A1A"/>
+                </a:solidFill>
+                <a:latin typeface="Calibri"/>
+              </a:rPr>
+              <a:t>  •  Next: real singers, diverse repertoire,
+richer features, interactive tool.</a:t>
             </a:r>
           </a:p>
         </p:txBody>
@@ -6375,7 +6411,7 @@
     <p:bg>
       <p:bgPr>
         <a:solidFill>
-          <a:srgbClr val="6B1D2A"/>
+          <a:srgbClr val="0B1F3B"/>
         </a:solidFill>
         <a:effectLst/>
       </p:bgPr>
@@ -6402,7 +6438,7 @@
             <a:avLst/>
           </a:prstGeom>
           <a:solidFill>
-            <a:srgbClr val="C59B3F"/>
+            <a:srgbClr val="FF5D7A"/>
           </a:solidFill>
           <a:ln>
             <a:noFill/>
@@ -6445,7 +6481,7 @@
             <a:avLst/>
           </a:prstGeom>
           <a:solidFill>
-            <a:srgbClr val="C59B3F"/>
+            <a:srgbClr val="FF5D7A"/>
           </a:solidFill>
           <a:ln>
             <a:noFill/>
@@ -6535,7 +6571,7 @@
             <a:r>
               <a:rPr sz="2400" b="0" i="1">
                 <a:solidFill>
-                  <a:srgbClr val="F5E6C4"/>
+                  <a:srgbClr val="F4F6F8"/>
                 </a:solidFill>
                 <a:latin typeface="Calibri"/>
               </a:rPr>
@@ -6571,7 +6607,7 @@
             <a:r>
               <a:rPr sz="3600" b="1" i="0">
                 <a:solidFill>
-                  <a:srgbClr val="C59B3F"/>
+                  <a:srgbClr val="FF5D7A"/>
                 </a:solidFill>
                 <a:latin typeface="Calibri"/>
               </a:rPr>
@@ -6606,7 +6642,7 @@
             <a:r>
               <a:rPr sz="1800" b="0" i="0">
                 <a:solidFill>
-                  <a:srgbClr val="F5E6C4"/>
+                  <a:srgbClr val="F4F6F8"/>
                 </a:solidFill>
                 <a:latin typeface="Calibri"/>
               </a:rPr>
@@ -6618,7 +6654,7 @@
             <a:r>
               <a:rPr sz="1800" b="0" i="0">
                 <a:solidFill>
-                  <a:srgbClr val="F5E6C4"/>
+                  <a:srgbClr val="F4F6F8"/>
                 </a:solidFill>
                 <a:latin typeface="Calibri"/>
               </a:rPr>
@@ -6641,7 +6677,7 @@
     <p:bg>
       <p:bgPr>
         <a:solidFill>
-          <a:srgbClr val="FDF6EC"/>
+          <a:srgbClr val="FFFFFF"/>
         </a:solidFill>
         <a:effectLst/>
       </p:bgPr>
@@ -6679,7 +6715,7 @@
             <a:r>
               <a:rPr sz="3400" b="0" i="1">
                 <a:solidFill>
-                  <a:srgbClr val="6B1D2A"/>
+                  <a:srgbClr val="0B1F3B"/>
                 </a:solidFill>
                 <a:latin typeface="Calibri"/>
               </a:rPr>
@@ -6719,11 +6755,11 @@
             <a:r>
               <a:rPr sz="2400" b="0" i="0">
                 <a:solidFill>
-                  <a:srgbClr val="2D2D2D"/>
-                </a:solidFill>
-                <a:latin typeface="Calibri"/>
-              </a:rPr>
-              <a:t>For singers, choosing the wrong piece is not just an inconvenience.</a:t>
+                  <a:srgbClr val="1A1A1A"/>
+                </a:solidFill>
+                <a:latin typeface="Calibri"/>
+              </a:rPr>
+              <a:t>The wrong piece is not just an inconvenience.</a:t>
             </a:r>
           </a:p>
           <a:p>
@@ -6735,7 +6771,7 @@
             <a:r>
               <a:rPr sz="2600" b="1" i="0">
                 <a:solidFill>
-                  <a:srgbClr val="6B1D2A"/>
+                  <a:srgbClr val="0B1F3B"/>
                 </a:solidFill>
                 <a:latin typeface="Calibri"/>
               </a:rPr>
@@ -6751,11 +6787,46 @@
             <a:r>
               <a:rPr sz="2600" b="0" i="1">
                 <a:solidFill>
-                  <a:srgbClr val="C59B3F"/>
-                </a:solidFill>
-                <a:latin typeface="Calibri"/>
-              </a:rPr>
-              <a:t>What if we could use data to help?</a:t>
+                  <a:srgbClr val="FF5D7A"/>
+                </a:solidFill>
+                <a:latin typeface="Calibri"/>
+              </a:rPr>
+              <a:t>What if data could help?</a:t>
+            </a:r>
+          </a:p>
+        </p:txBody>
+      </p:sp>
+      <p:sp>
+        <p:nvSpPr>
+          <p:cNvPr id="4" name="TextBox 3"/>
+          <p:cNvSpPr txBox="1"/>
+          <p:nvPr/>
+        </p:nvSpPr>
+        <p:spPr>
+          <a:xfrm>
+            <a:off x="457200" y="6309360"/>
+            <a:ext cx="11277295" cy="365760"/>
+          </a:xfrm>
+          <a:prstGeom prst="rect">
+            <a:avLst/>
+          </a:prstGeom>
+          <a:noFill/>
+        </p:spPr>
+        <p:txBody>
+          <a:bodyPr wrap="none">
+            <a:spAutoFit/>
+          </a:bodyPr>
+          <a:lstStyle/>
+          <a:p>
+            <a:pPr algn="r"/>
+            <a:r>
+              <a:rPr sz="1200" b="0" i="1">
+                <a:solidFill>
+                  <a:srgbClr val="2E4A7D"/>
+                </a:solidFill>
+                <a:latin typeface="Calibri"/>
+              </a:rPr>
+              <a:t>Apfelbach, 2022; Phyland et al., 1999</a:t>
             </a:r>
           </a:p>
         </p:txBody>
@@ -6774,7 +6845,7 @@
     <p:bg>
       <p:bgPr>
         <a:solidFill>
-          <a:srgbClr val="FDF6EC"/>
+          <a:srgbClr val="FFFFFF"/>
         </a:solidFill>
         <a:effectLst/>
       </p:bgPr>
@@ -6801,7 +6872,7 @@
             <a:avLst/>
           </a:prstGeom>
           <a:solidFill>
-            <a:srgbClr val="6B1D2A"/>
+            <a:srgbClr val="0B1F3B"/>
           </a:solidFill>
           <a:ln>
             <a:noFill/>
@@ -6859,7 +6930,7 @@
                 </a:solidFill>
                 <a:latin typeface="Calibri"/>
               </a:rPr>
-              <a:t>The Gap</a:t>
+              <a:t>The Current Approach</a:t>
             </a:r>
           </a:p>
         </p:txBody>
@@ -6879,7 +6950,7 @@
             <a:avLst/>
           </a:prstGeom>
           <a:solidFill>
-            <a:srgbClr val="C59B3F"/>
+            <a:srgbClr val="FF5D7A"/>
           </a:solidFill>
           <a:ln>
             <a:noFill/>
@@ -6909,14 +6980,238 @@
       </p:sp>
       <p:sp>
         <p:nvSpPr>
-          <p:cNvPr id="5" name="TextBox 4"/>
+          <p:cNvPr id="5" name="Rounded Rectangle 4"/>
+          <p:cNvSpPr/>
+          <p:nvPr/>
+        </p:nvSpPr>
+        <p:spPr>
+          <a:xfrm>
+            <a:off x="502920" y="1371600"/>
+            <a:ext cx="5120640" cy="4114800"/>
+          </a:xfrm>
+          <a:prstGeom prst="roundRect">
+            <a:avLst/>
+          </a:prstGeom>
+          <a:solidFill>
+            <a:srgbClr val="F4F6F8"/>
+          </a:solidFill>
+          <a:ln w="15240">
+            <a:solidFill>
+              <a:srgbClr val="2E4A7D"/>
+            </a:solidFill>
+          </a:ln>
+        </p:spPr>
+        <p:style>
+          <a:lnRef idx="1">
+            <a:schemeClr val="accent1"/>
+          </a:lnRef>
+          <a:fillRef idx="3">
+            <a:schemeClr val="accent1"/>
+          </a:fillRef>
+          <a:effectRef idx="2">
+            <a:schemeClr val="accent1"/>
+          </a:effectRef>
+          <a:fontRef idx="minor">
+            <a:schemeClr val="lt1"/>
+          </a:fontRef>
+        </p:style>
+        <p:txBody>
+          <a:bodyPr rtlCol="0" anchor="ctr" wrap="square" lIns="228600" rIns="182880" tIns="164592"/>
+          <a:lstStyle/>
+          <a:p>
+            <a:pPr algn="l"/>
+            <a:r>
+              <a:rPr sz="2000" b="1" i="0">
+                <a:solidFill>
+                  <a:srgbClr val="2E4A7D"/>
+                </a:solidFill>
+                <a:latin typeface="Calibri"/>
+              </a:rPr>
+              <a:t>Filtering by Range</a:t>
+            </a:r>
+          </a:p>
+          <a:p>
+            <a:pPr>
+              <a:spcBef>
+                <a:spcPts val="800"/>
+              </a:spcBef>
+            </a:pPr>
+            <a:r>
+              <a:rPr sz="1700" b="0" i="0">
+                <a:solidFill>
+                  <a:srgbClr val="1A1A1A"/>
+                </a:solidFill>
+                <a:latin typeface="Calibri"/>
+              </a:rPr>
+              <a:t>  •  Filter songs by minimum and
+maximum pitch in the vocal line.</a:t>
+            </a:r>
+          </a:p>
+          <a:p>
+            <a:pPr>
+              <a:spcBef>
+                <a:spcPts val="800"/>
+              </a:spcBef>
+            </a:pPr>
+            <a:r>
+              <a:rPr sz="1700" b="0" i="0">
+                <a:solidFill>
+                  <a:srgbClr val="1A1A1A"/>
+                </a:solidFill>
+                <a:latin typeface="Calibri"/>
+              </a:rPr>
+              <a:t>  •  Shows the extremes — not how
+much time the voice spends there.</a:t>
+            </a:r>
+          </a:p>
+          <a:p>
+            <a:pPr>
+              <a:spcBef>
+                <a:spcPts val="800"/>
+              </a:spcBef>
+            </a:pPr>
+            <a:r>
+              <a:rPr sz="1700" b="0" i="0">
+                <a:solidFill>
+                  <a:srgbClr val="1A1A1A"/>
+                </a:solidFill>
+                <a:latin typeface="Calibri"/>
+              </a:rPr>
+              <a:t>  •  One high climax note looks the
+same as sitting high the whole time.</a:t>
+            </a:r>
+          </a:p>
+        </p:txBody>
+      </p:sp>
+      <p:sp>
+        <p:nvSpPr>
+          <p:cNvPr id="6" name="Rounded Rectangle 5"/>
+          <p:cNvSpPr/>
+          <p:nvPr/>
+        </p:nvSpPr>
+        <p:spPr>
+          <a:xfrm>
+            <a:off x="6355080" y="1371600"/>
+            <a:ext cx="5120640" cy="4114800"/>
+          </a:xfrm>
+          <a:prstGeom prst="roundRect">
+            <a:avLst/>
+          </a:prstGeom>
+          <a:solidFill>
+            <a:srgbClr val="0B1F3B"/>
+          </a:solidFill>
+          <a:ln>
+            <a:noFill/>
+          </a:ln>
+        </p:spPr>
+        <p:style>
+          <a:lnRef idx="1">
+            <a:schemeClr val="accent1"/>
+          </a:lnRef>
+          <a:fillRef idx="3">
+            <a:schemeClr val="accent1"/>
+          </a:fillRef>
+          <a:effectRef idx="2">
+            <a:schemeClr val="accent1"/>
+          </a:effectRef>
+          <a:fontRef idx="minor">
+            <a:schemeClr val="lt1"/>
+          </a:fontRef>
+        </p:style>
+        <p:txBody>
+          <a:bodyPr rtlCol="0" anchor="ctr" wrap="square" lIns="228600" rIns="182880" tIns="164592"/>
+          <a:lstStyle/>
+          <a:p>
+            <a:pPr algn="l"/>
+            <a:r>
+              <a:rPr sz="2000" b="1" i="0">
+                <a:solidFill>
+                  <a:srgbClr val="FF5D7A"/>
+                </a:solidFill>
+                <a:latin typeface="Calibri"/>
+              </a:rPr>
+              <a:t>Filtering by Fach</a:t>
+            </a:r>
+          </a:p>
+          <a:p>
+            <a:pPr>
+              <a:spcBef>
+                <a:spcPts val="800"/>
+              </a:spcBef>
+            </a:pPr>
+            <a:r>
+              <a:rPr sz="1700" b="0" i="0">
+                <a:solidFill>
+                  <a:srgbClr val="FFFFFF"/>
+                </a:solidFill>
+                <a:latin typeface="Calibri"/>
+              </a:rPr>
+              <a:t>  •  Categorizes voices by range, weight,
+and color (e.g. lyric soprano).</a:t>
+            </a:r>
+          </a:p>
+          <a:p>
+            <a:pPr>
+              <a:spcBef>
+                <a:spcPts val="800"/>
+              </a:spcBef>
+            </a:pPr>
+            <a:r>
+              <a:rPr sz="1700" b="0" i="0">
+                <a:solidFill>
+                  <a:srgbClr val="FFFFFF"/>
+                </a:solidFill>
+                <a:latin typeface="Calibri"/>
+              </a:rPr>
+              <a:t>  •  Labels inconsistently defined across
+regions (Schloneger et al., 2024).</a:t>
+            </a:r>
+          </a:p>
+          <a:p>
+            <a:pPr>
+              <a:spcBef>
+                <a:spcPts val="800"/>
+              </a:spcBef>
+            </a:pPr>
+            <a:r>
+              <a:rPr sz="1700" b="0" i="0">
+                <a:solidFill>
+                  <a:srgbClr val="FFFFFF"/>
+                </a:solidFill>
+                <a:latin typeface="Calibri"/>
+              </a:rPr>
+              <a:t>  •  Many voices fall between categories.</a:t>
+            </a:r>
+          </a:p>
+          <a:p>
+            <a:pPr>
+              <a:spcBef>
+                <a:spcPts val="800"/>
+              </a:spcBef>
+            </a:pPr>
+            <a:r>
+              <a:rPr sz="1700" b="0" i="0">
+                <a:solidFill>
+                  <a:srgbClr val="FFFFFF"/>
+                </a:solidFill>
+                <a:latin typeface="Calibri"/>
+              </a:rPr>
+              <a:t>  •  Broad categories, not tailored to
+an individual singer.</a:t>
+            </a:r>
+          </a:p>
+        </p:txBody>
+      </p:sp>
+      <p:sp>
+        <p:nvSpPr>
+          <p:cNvPr id="7" name="TextBox 6"/>
           <p:cNvSpPr txBox="1"/>
           <p:nvPr/>
         </p:nvSpPr>
         <p:spPr>
           <a:xfrm>
-            <a:off x="685800" y="1371600"/>
-            <a:ext cx="10789920" cy="5029200"/>
+            <a:off x="502920" y="5715000"/>
+            <a:ext cx="11155680" cy="731520"/>
           </a:xfrm>
           <a:prstGeom prst="rect">
             <a:avLst/>
@@ -6924,59 +7219,20 @@
           <a:noFill/>
         </p:spPr>
         <p:txBody>
-          <a:bodyPr wrap="square">
+          <a:bodyPr wrap="none">
             <a:spAutoFit/>
           </a:bodyPr>
           <a:lstStyle/>
           <a:p>
-            <a:pPr algn="l">
-              <a:spcAft>
-                <a:spcPts val="800"/>
-              </a:spcAft>
-            </a:pPr>
-            <a:r>
-              <a:rPr sz="2200" b="0" i="0">
-                <a:solidFill>
-                  <a:srgbClr val="2D2D2D"/>
-                </a:solidFill>
-                <a:latin typeface="Calibri"/>
-              </a:rPr>
-              <a:t>  •  Current tools (like Tessa) analyze a piece after you already picked it —
-they do not recommend new pieces likely to fit.</a:t>
-            </a:r>
-          </a:p>
-          <a:p>
-            <a:pPr algn="l">
-              <a:spcAft>
-                <a:spcPts val="800"/>
-              </a:spcAft>
-            </a:pPr>
-            <a:r>
-              <a:rPr sz="2200" b="0" i="0">
-                <a:solidFill>
-                  <a:srgbClr val="2D2D2D"/>
-                </a:solidFill>
-                <a:latin typeface="Calibri"/>
-              </a:rPr>
-              <a:t>  •  Filtering by range alone is misleading: it shows the extremes,
-not where the voice spends most of its time.</a:t>
-            </a:r>
-          </a:p>
-          <a:p>
-            <a:pPr algn="l">
-              <a:spcAft>
-                <a:spcPts val="800"/>
-              </a:spcAft>
-            </a:pPr>
-            <a:r>
-              <a:rPr sz="2200" b="0" i="0">
-                <a:solidFill>
-                  <a:srgbClr val="2D2D2D"/>
-                </a:solidFill>
-                <a:latin typeface="Calibri"/>
-              </a:rPr>
-              <a:t>  •  As a former performance major, I lived this problem.
-As a data scientist, I built a solution.</a:t>
+            <a:pPr algn="ctr"/>
+            <a:r>
+              <a:rPr sz="2200" b="0" i="1">
+                <a:solidFill>
+                  <a:srgbClr val="0B1F3B"/>
+                </a:solidFill>
+                <a:latin typeface="Calibri"/>
+              </a:rPr>
+              <a:t>Neither captures where the voice actually spends its time.</a:t>
             </a:r>
           </a:p>
         </p:txBody>
@@ -6995,7 +7251,7 @@
     <p:bg>
       <p:bgPr>
         <a:solidFill>
-          <a:srgbClr val="FDF6EC"/>
+          <a:srgbClr val="FFFFFF"/>
         </a:solidFill>
         <a:effectLst/>
       </p:bgPr>
@@ -7022,7 +7278,7 @@
             <a:avLst/>
           </a:prstGeom>
           <a:solidFill>
-            <a:srgbClr val="6B1D2A"/>
+            <a:srgbClr val="0B1F3B"/>
           </a:solidFill>
           <a:ln>
             <a:noFill/>
@@ -7080,7 +7336,7 @@
                 </a:solidFill>
                 <a:latin typeface="Calibri"/>
               </a:rPr>
-              <a:t>What Is Tessitura?</a:t>
+              <a:t>Tessitura &amp; the Tessituragram</a:t>
             </a:r>
           </a:p>
         </p:txBody>
@@ -7100,7 +7356,7 @@
             <a:avLst/>
           </a:prstGeom>
           <a:solidFill>
-            <a:srgbClr val="C59B3F"/>
+            <a:srgbClr val="FF5D7A"/>
           </a:solidFill>
           <a:ln>
             <a:noFill/>
@@ -7130,97 +7386,24 @@
       </p:sp>
       <p:sp>
         <p:nvSpPr>
-          <p:cNvPr id="5" name="TextBox 4"/>
-          <p:cNvSpPr txBox="1"/>
-          <p:nvPr/>
-        </p:nvSpPr>
-        <p:spPr>
-          <a:xfrm>
-            <a:off x="685800" y="1371600"/>
-            <a:ext cx="5943600" cy="3200400"/>
-          </a:xfrm>
-          <a:prstGeom prst="rect">
-            <a:avLst/>
-          </a:prstGeom>
-          <a:noFill/>
-        </p:spPr>
-        <p:txBody>
-          <a:bodyPr wrap="square">
-            <a:spAutoFit/>
-          </a:bodyPr>
-          <a:lstStyle/>
-          <a:p>
-            <a:pPr algn="l">
-              <a:spcAft>
-                <a:spcPts val="800"/>
-              </a:spcAft>
-            </a:pPr>
-            <a:r>
-              <a:rPr sz="2200" b="0" i="0">
-                <a:solidFill>
-                  <a:srgbClr val="2D2D2D"/>
-                </a:solidFill>
-                <a:latin typeface="Calibri"/>
-              </a:rPr>
-              <a:t>  •  Tessitura is NOT just the highest and lowest notes.</a:t>
-            </a:r>
-          </a:p>
-          <a:p>
-            <a:pPr algn="l">
-              <a:spcAft>
-                <a:spcPts val="800"/>
-              </a:spcAft>
-            </a:pPr>
-            <a:r>
-              <a:rPr sz="2200" b="0" i="0">
-                <a:solidFill>
-                  <a:srgbClr val="2D2D2D"/>
-                </a:solidFill>
-                <a:latin typeface="Calibri"/>
-              </a:rPr>
-              <a:t>  •  It is where the voice lives in a piece — the pitches
-that receive the most singing time.</a:t>
-            </a:r>
-          </a:p>
-          <a:p>
-            <a:pPr algn="l">
-              <a:spcAft>
-                <a:spcPts val="800"/>
-              </a:spcAft>
-            </a:pPr>
-            <a:r>
-              <a:rPr sz="2200" b="0" i="0">
-                <a:solidFill>
-                  <a:srgbClr val="2D2D2D"/>
-                </a:solidFill>
-                <a:latin typeface="Calibri"/>
-              </a:rPr>
-              <a:t>  •  Duration matters: sustaining a high note for 8 beats
-is far more demanding than touching it briefly.</a:t>
-            </a:r>
-          </a:p>
-        </p:txBody>
-      </p:sp>
-      <p:sp>
-        <p:nvSpPr>
-          <p:cNvPr id="6" name="Rounded Rectangle 5"/>
+          <p:cNvPr id="5" name="Rounded Rectangle 4"/>
           <p:cNvSpPr/>
           <p:nvPr/>
         </p:nvSpPr>
         <p:spPr>
           <a:xfrm>
-            <a:off x="685800" y="4572000"/>
-            <a:ext cx="10789920" cy="1645920"/>
+            <a:off x="502920" y="1325880"/>
+            <a:ext cx="11155680" cy="1508760"/>
           </a:xfrm>
           <a:prstGeom prst="roundRect">
             <a:avLst/>
           </a:prstGeom>
           <a:solidFill>
-            <a:srgbClr val="F5E6C4"/>
+            <a:srgbClr val="F4F6F8"/>
           </a:solidFill>
-          <a:ln w="19050">
+          <a:ln w="15240">
             <a:solidFill>
-              <a:srgbClr val="C59B3F"/>
+              <a:srgbClr val="2E4A7D"/>
             </a:solidFill>
           </a:ln>
         </p:spPr>
@@ -7239,18 +7422,137 @@
           </a:fontRef>
         </p:style>
         <p:txBody>
-          <a:bodyPr rtlCol="0" anchor="ctr" wrap="square" lIns="274320" tIns="182880"/>
+          <a:bodyPr rtlCol="0" anchor="ctr" wrap="square" lIns="320040" rIns="274320" tIns="164592"/>
           <a:lstStyle/>
           <a:p>
             <a:pPr algn="l"/>
             <a:r>
-              <a:rPr sz="2000" b="0" i="1">
-                <a:solidFill>
-                  <a:srgbClr val="2D2D2D"/>
-                </a:solidFill>
-                <a:latin typeface="Calibri"/>
-              </a:rPr>
-              <a:t>Analogy for non-musicians:  Think of it like your daily commute vs. the farthest you’ve ever driven. What matters for wear-and-tear is the daily average, not the one-time extreme.</a:t>
+              <a:rPr sz="2400" b="1" i="0">
+                <a:solidFill>
+                  <a:srgbClr val="2E4A7D"/>
+                </a:solidFill>
+                <a:latin typeface="Calibri"/>
+              </a:rPr>
+              <a:t>Tessitura</a:t>
+            </a:r>
+          </a:p>
+          <a:p>
+            <a:pPr>
+              <a:spcBef>
+                <a:spcPts val="1000"/>
+              </a:spcBef>
+            </a:pPr>
+            <a:r>
+              <a:rPr sz="2000" b="0" i="0">
+                <a:solidFill>
+                  <a:srgbClr val="1A1A1A"/>
+                </a:solidFill>
+                <a:latin typeface="Calibri"/>
+              </a:rPr>
+              <a:t>The pitches where the voice spends most of its time — not just the highest and lowest notes.</a:t>
+            </a:r>
+          </a:p>
+        </p:txBody>
+      </p:sp>
+      <p:sp>
+        <p:nvSpPr>
+          <p:cNvPr id="6" name="Rounded Rectangle 5"/>
+          <p:cNvSpPr/>
+          <p:nvPr/>
+        </p:nvSpPr>
+        <p:spPr>
+          <a:xfrm>
+            <a:off x="502920" y="3063240"/>
+            <a:ext cx="11155680" cy="3246120"/>
+          </a:xfrm>
+          <a:prstGeom prst="roundRect">
+            <a:avLst/>
+          </a:prstGeom>
+          <a:solidFill>
+            <a:srgbClr val="0B1F3B"/>
+          </a:solidFill>
+          <a:ln>
+            <a:noFill/>
+          </a:ln>
+        </p:spPr>
+        <p:style>
+          <a:lnRef idx="1">
+            <a:schemeClr val="accent1"/>
+          </a:lnRef>
+          <a:fillRef idx="3">
+            <a:schemeClr val="accent1"/>
+          </a:fillRef>
+          <a:effectRef idx="2">
+            <a:schemeClr val="accent1"/>
+          </a:effectRef>
+          <a:fontRef idx="minor">
+            <a:schemeClr val="lt1"/>
+          </a:fontRef>
+        </p:style>
+        <p:txBody>
+          <a:bodyPr rtlCol="0" anchor="ctr" wrap="square" lIns="411480" rIns="411480" tIns="201168"/>
+          <a:lstStyle/>
+          <a:p>
+            <a:pPr algn="l"/>
+            <a:r>
+              <a:rPr sz="2400" b="1" i="0">
+                <a:solidFill>
+                  <a:srgbClr val="FF5D7A"/>
+                </a:solidFill>
+                <a:latin typeface="Calibri"/>
+              </a:rPr>
+              <a:t>Tessituragram</a:t>
+            </a:r>
+          </a:p>
+          <a:p>
+            <a:pPr>
+              <a:spcBef>
+                <a:spcPts val="1800"/>
+              </a:spcBef>
+            </a:pPr>
+            <a:r>
+              <a:rPr sz="1900" b="0" i="0">
+                <a:solidFill>
+                  <a:srgbClr val="FFFFFF"/>
+                </a:solidFill>
+                <a:latin typeface="Calibri"/>
+              </a:rPr>
+              <a:t>•   Thurmer (1988): histogram of singing time
+per pitch — a song's fingerprint.</a:t>
+            </a:r>
+          </a:p>
+          <a:p>
+            <a:pPr>
+              <a:spcBef>
+                <a:spcPts val="1800"/>
+              </a:spcBef>
+            </a:pPr>
+            <a:r>
+              <a:rPr sz="1900" b="0" i="0">
+                <a:solidFill>
+                  <a:srgbClr val="FFFFFF"/>
+                </a:solidFill>
+                <a:latin typeface="Calibri"/>
+              </a:rPr>
+              <a:t>•   Duration-weighted: longer notes count more
+(Titze, 2008).</a:t>
+            </a:r>
+          </a:p>
+          <a:p>
+            <a:pPr>
+              <a:spcBef>
+                <a:spcPts val="1800"/>
+              </a:spcBef>
+            </a:pPr>
+            <a:r>
+              <a:rPr sz="1900" b="0" i="0">
+                <a:solidFill>
+                  <a:srgbClr val="FFFFFF"/>
+                </a:solidFill>
+                <a:latin typeface="Calibri"/>
+              </a:rPr>
+              <a:t>•   Range and Fach don't quantify a song's
+internal pitch-duration distribution.</a:t>
             </a:r>
           </a:p>
         </p:txBody>
@@ -7269,7 +7571,7 @@
     <p:bg>
       <p:bgPr>
         <a:solidFill>
-          <a:srgbClr val="FDF6EC"/>
+          <a:srgbClr val="FFFFFF"/>
         </a:solidFill>
         <a:effectLst/>
       </p:bgPr>
@@ -7296,7 +7598,7 @@
             <a:avLst/>
           </a:prstGeom>
           <a:solidFill>
-            <a:srgbClr val="6B1D2A"/>
+            <a:srgbClr val="0B1F3B"/>
           </a:solidFill>
           <a:ln>
             <a:noFill/>
@@ -7354,7 +7656,7 @@
                 </a:solidFill>
                 <a:latin typeface="Calibri"/>
               </a:rPr>
-              <a:t>What Is a Tessituragram?</a:t>
+              <a:t>The Gap</a:t>
             </a:r>
           </a:p>
         </p:txBody>
@@ -7374,7 +7676,7 @@
             <a:avLst/>
           </a:prstGeom>
           <a:solidFill>
-            <a:srgbClr val="C59B3F"/>
+            <a:srgbClr val="FF5D7A"/>
           </a:solidFill>
           <a:ln>
             <a:noFill/>
@@ -7404,14 +7706,222 @@
       </p:sp>
       <p:sp>
         <p:nvSpPr>
-          <p:cNvPr id="5" name="TextBox 4"/>
+          <p:cNvPr id="5" name="Rounded Rectangle 4"/>
+          <p:cNvSpPr/>
+          <p:nvPr/>
+        </p:nvSpPr>
+        <p:spPr>
+          <a:xfrm>
+            <a:off x="502920" y="1371600"/>
+            <a:ext cx="5120640" cy="3291840"/>
+          </a:xfrm>
+          <a:prstGeom prst="roundRect">
+            <a:avLst/>
+          </a:prstGeom>
+          <a:solidFill>
+            <a:srgbClr val="F4F6F8"/>
+          </a:solidFill>
+          <a:ln w="15240">
+            <a:solidFill>
+              <a:srgbClr val="2E4A7D"/>
+            </a:solidFill>
+          </a:ln>
+        </p:spPr>
+        <p:style>
+          <a:lnRef idx="1">
+            <a:schemeClr val="accent1"/>
+          </a:lnRef>
+          <a:fillRef idx="3">
+            <a:schemeClr val="accent1"/>
+          </a:fillRef>
+          <a:effectRef idx="2">
+            <a:schemeClr val="accent1"/>
+          </a:effectRef>
+          <a:fontRef idx="minor">
+            <a:schemeClr val="lt1"/>
+          </a:fontRef>
+        </p:style>
+        <p:txBody>
+          <a:bodyPr rtlCol="0" anchor="ctr" wrap="square" lIns="228600" rIns="182880" tIns="164592"/>
+          <a:lstStyle/>
+          <a:p>
+            <a:pPr algn="l"/>
+            <a:r>
+              <a:rPr sz="2000" b="1" i="0">
+                <a:solidFill>
+                  <a:srgbClr val="2E4A7D"/>
+                </a:solidFill>
+                <a:latin typeface="Calibri"/>
+              </a:rPr>
+              <a:t>Existing Tessitura Tools</a:t>
+            </a:r>
+          </a:p>
+          <a:p>
+            <a:pPr>
+              <a:spcBef>
+                <a:spcPts val="800"/>
+              </a:spcBef>
+            </a:pPr>
+            <a:r>
+              <a:rPr sz="1700" b="0" i="0">
+                <a:solidFill>
+                  <a:srgbClr val="1A1A1A"/>
+                </a:solidFill>
+                <a:latin typeface="Calibri"/>
+              </a:rPr>
+              <a:t>  •  Tessa (Apfelbach, 2022): extracts
+tessituragrams and summary statistics.</a:t>
+            </a:r>
+          </a:p>
+          <a:p>
+            <a:pPr>
+              <a:spcBef>
+                <a:spcPts val="800"/>
+              </a:spcBef>
+            </a:pPr>
+            <a:r>
+              <a:rPr sz="1700" b="0" i="0">
+                <a:solidFill>
+                  <a:srgbClr val="1A1A1A"/>
+                </a:solidFill>
+                <a:latin typeface="Calibri"/>
+              </a:rPr>
+              <a:t>  •  Kassia Database: human-assessed
+tessitura per art song entry.</a:t>
+            </a:r>
+          </a:p>
+          <a:p>
+            <a:pPr>
+              <a:spcBef>
+                <a:spcPts val="800"/>
+              </a:spcBef>
+            </a:pPr>
+            <a:r>
+              <a:rPr sz="1700" b="0" i="0">
+                <a:solidFill>
+                  <a:srgbClr val="1A1A1A"/>
+                </a:solidFill>
+                <a:latin typeface="Calibri"/>
+              </a:rPr>
+              <a:t>  •  Both evaluate a piece after it has
+already been selected.</a:t>
+            </a:r>
+          </a:p>
+        </p:txBody>
+      </p:sp>
+      <p:sp>
+        <p:nvSpPr>
+          <p:cNvPr id="6" name="Rounded Rectangle 5"/>
+          <p:cNvSpPr/>
+          <p:nvPr/>
+        </p:nvSpPr>
+        <p:spPr>
+          <a:xfrm>
+            <a:off x="6355080" y="1371600"/>
+            <a:ext cx="5120640" cy="3291840"/>
+          </a:xfrm>
+          <a:prstGeom prst="roundRect">
+            <a:avLst/>
+          </a:prstGeom>
+          <a:solidFill>
+            <a:srgbClr val="0B1F3B"/>
+          </a:solidFill>
+          <a:ln>
+            <a:noFill/>
+          </a:ln>
+        </p:spPr>
+        <p:style>
+          <a:lnRef idx="1">
+            <a:schemeClr val="accent1"/>
+          </a:lnRef>
+          <a:fillRef idx="3">
+            <a:schemeClr val="accent1"/>
+          </a:fillRef>
+          <a:effectRef idx="2">
+            <a:schemeClr val="accent1"/>
+          </a:effectRef>
+          <a:fontRef idx="minor">
+            <a:schemeClr val="lt1"/>
+          </a:fontRef>
+        </p:style>
+        <p:txBody>
+          <a:bodyPr rtlCol="0" anchor="ctr" wrap="square" lIns="228600" rIns="182880" tIns="164592"/>
+          <a:lstStyle/>
+          <a:p>
+            <a:pPr algn="l"/>
+            <a:r>
+              <a:rPr sz="2000" b="1" i="0">
+                <a:solidFill>
+                  <a:srgbClr val="FF5D7A"/>
+                </a:solidFill>
+                <a:latin typeface="Calibri"/>
+              </a:rPr>
+              <a:t>What’s Missing</a:t>
+            </a:r>
+          </a:p>
+          <a:p>
+            <a:pPr>
+              <a:spcBef>
+                <a:spcPts val="800"/>
+              </a:spcBef>
+            </a:pPr>
+            <a:r>
+              <a:rPr sz="1700" b="0" i="0">
+                <a:solidFill>
+                  <a:srgbClr val="FFFFFF"/>
+                </a:solidFill>
+                <a:latin typeface="Calibri"/>
+              </a:rPr>
+              <a:t>  •  No tool recommends pieces whose
+pitch distribution fits a singer.</a:t>
+            </a:r>
+          </a:p>
+          <a:p>
+            <a:pPr>
+              <a:spcBef>
+                <a:spcPts val="800"/>
+              </a:spcBef>
+            </a:pPr>
+            <a:r>
+              <a:rPr sz="1700" b="0" i="0">
+                <a:solidFill>
+                  <a:srgbClr val="FFFFFF"/>
+                </a:solidFill>
+                <a:latin typeface="Calibri"/>
+              </a:rPr>
+              <a:t>  •  No pitch-level query: “Find pieces
+on THESE notes, avoid THOSE.”</a:t>
+            </a:r>
+          </a:p>
+          <a:p>
+            <a:pPr>
+              <a:spcBef>
+                <a:spcPts val="800"/>
+              </a:spcBef>
+            </a:pPr>
+            <a:r>
+              <a:rPr sz="1700" b="0" i="0">
+                <a:solidFill>
+                  <a:srgbClr val="FFFFFF"/>
+                </a:solidFill>
+                <a:latin typeface="Calibri"/>
+              </a:rPr>
+              <a:t>  •  217,000+ cataloged settings
+(LiederNet) — manual search can’t scale.</a:t>
+            </a:r>
+          </a:p>
+        </p:txBody>
+      </p:sp>
+      <p:sp>
+        <p:nvSpPr>
+          <p:cNvPr id="7" name="TextBox 6"/>
           <p:cNvSpPr txBox="1"/>
           <p:nvPr/>
         </p:nvSpPr>
         <p:spPr>
           <a:xfrm>
-            <a:off x="685800" y="1371600"/>
-            <a:ext cx="10789920" cy="5029200"/>
+            <a:off x="502920" y="4937760"/>
+            <a:ext cx="11155680" cy="1371600"/>
           </a:xfrm>
           <a:prstGeom prst="rect">
             <a:avLst/>
@@ -7424,70 +7934,27 @@
           </a:bodyPr>
           <a:lstStyle/>
           <a:p>
-            <a:pPr algn="l">
-              <a:spcAft>
-                <a:spcPts val="800"/>
-              </a:spcAft>
-            </a:pPr>
-            <a:r>
-              <a:rPr sz="2200" b="0" i="0">
-                <a:solidFill>
-                  <a:srgbClr val="2D2D2D"/>
-                </a:solidFill>
-                <a:latin typeface="Calibri"/>
-              </a:rPr>
-              <a:t>  •  A tessituragram is a fingerprint of a song — a histogram
-of how much singing time falls on each pitch.</a:t>
-            </a:r>
-          </a:p>
-          <a:p>
-            <a:pPr algn="l">
-              <a:spcAft>
-                <a:spcPts val="800"/>
-              </a:spcAft>
-            </a:pPr>
-            <a:r>
-              <a:rPr sz="2200" b="0" i="0">
-                <a:solidFill>
-                  <a:srgbClr val="2D2D2D"/>
-                </a:solidFill>
-                <a:latin typeface="Calibri"/>
-              </a:rPr>
-              <a:t>  •  Built from MusicXML scores using music21:
-MIDI pitch → total duration in quarter-note beats.</a:t>
-            </a:r>
-          </a:p>
-          <a:p>
-            <a:pPr algn="l">
-              <a:spcAft>
-                <a:spcPts val="800"/>
-              </a:spcAft>
-            </a:pPr>
-            <a:r>
-              <a:rPr sz="2200" b="0" i="0">
-                <a:solidFill>
-                  <a:srgbClr val="2D2D2D"/>
-                </a:solidFill>
-                <a:latin typeface="Calibri"/>
-              </a:rPr>
-              <a:t>  •  Duration-weighted: longer notes count more, because
-sustaining a pitch is more demanding than a passing tone.</a:t>
-            </a:r>
-          </a:p>
-          <a:p>
-            <a:pPr algn="l">
-              <a:spcAft>
-                <a:spcPts val="800"/>
-              </a:spcAft>
-            </a:pPr>
-            <a:r>
-              <a:rPr sz="2200" b="0" i="0">
-                <a:solidFill>
-                  <a:srgbClr val="2D2D2D"/>
-                </a:solidFill>
-                <a:latin typeface="Calibri"/>
-              </a:rPr>
-              <a:t>  •  Can we use these fingerprints to match songs to singers?</a:t>
+            <a:pPr algn="ctr"/>
+            <a:r>
+              <a:rPr sz="2100" b="0" i="1">
+                <a:solidFill>
+                  <a:srgbClr val="1A1A1A"/>
+                </a:solidFill>
+                <a:latin typeface="Calibri"/>
+              </a:rPr>
+              <a:t>Tessituragrams capture vocal demand —</a:t>
+            </a:r>
+          </a:p>
+          <a:p>
+            <a:pPr algn="ctr"/>
+            <a:r>
+              <a:rPr sz="2100" b="1" i="1">
+                <a:solidFill>
+                  <a:srgbClr val="0B1F3B"/>
+                </a:solidFill>
+                <a:latin typeface="Calibri"/>
+              </a:rPr>
+              <a:t>but no tool uses them to recommend new repertoire.</a:t>
             </a:r>
           </a:p>
         </p:txBody>
@@ -7506,7 +7973,7 @@
     <p:bg>
       <p:bgPr>
         <a:solidFill>
-          <a:srgbClr val="FDF6EC"/>
+          <a:srgbClr val="FFFFFF"/>
         </a:solidFill>
         <a:effectLst/>
       </p:bgPr>
@@ -7533,7 +8000,7 @@
             <a:avLst/>
           </a:prstGeom>
           <a:solidFill>
-            <a:srgbClr val="6B1D2A"/>
+            <a:srgbClr val="0B1F3B"/>
           </a:solidFill>
           <a:ln>
             <a:noFill/>
@@ -7611,7 +8078,7 @@
             <a:avLst/>
           </a:prstGeom>
           <a:solidFill>
-            <a:srgbClr val="C59B3F"/>
+            <a:srgbClr val="FF5D7A"/>
           </a:solidFill>
           <a:ln>
             <a:noFill/>
@@ -7647,17 +8114,19 @@
         </p:nvSpPr>
         <p:spPr>
           <a:xfrm>
-            <a:off x="700887" y="1828800"/>
-            <a:ext cx="1828800" cy="2011680"/>
+            <a:off x="685800" y="1234440"/>
+            <a:ext cx="10789920" cy="502920"/>
           </a:xfrm>
           <a:prstGeom prst="roundRect">
             <a:avLst/>
           </a:prstGeom>
           <a:solidFill>
-            <a:srgbClr val="6B1D2A"/>
+            <a:srgbClr val="F4F6F8"/>
           </a:solidFill>
-          <a:ln>
-            <a:noFill/>
+          <a:ln w="15240">
+            <a:solidFill>
+              <a:srgbClr val="3FA7A3"/>
+            </a:solidFill>
           </a:ln>
         </p:spPr>
         <p:style>
@@ -7675,80 +8144,38 @@
           </a:fontRef>
         </p:style>
         <p:txBody>
-          <a:bodyPr rtlCol="0" anchor="ctr" wrap="square"/>
-          <a:lstStyle/>
-          <a:p>
-            <a:pPr algn="ctr">
-              <a:spcBef>
-                <a:spcPts val="2400"/>
-              </a:spcBef>
-            </a:pPr>
-            <a:r>
-              <a:rPr sz="1800" b="1" i="0">
-                <a:solidFill>
-                  <a:srgbClr val="FFFFFF"/>
-                </a:solidFill>
-                <a:latin typeface="Calibri"/>
-              </a:rPr>
-              <a:t>Singer
-Preferences</a:t>
-            </a:r>
-          </a:p>
-        </p:txBody>
-      </p:sp>
-      <p:sp>
-        <p:nvSpPr>
-          <p:cNvPr id="6" name="TextBox 5"/>
-          <p:cNvSpPr txBox="1"/>
-          <p:nvPr/>
-        </p:nvSpPr>
-        <p:spPr>
-          <a:xfrm>
-            <a:off x="700887" y="4023360"/>
-            <a:ext cx="1828800" cy="1463040"/>
-          </a:xfrm>
-          <a:prstGeom prst="rect">
-            <a:avLst/>
-          </a:prstGeom>
-          <a:noFill/>
-        </p:spPr>
-        <p:txBody>
-          <a:bodyPr wrap="square">
-            <a:spAutoFit/>
-          </a:bodyPr>
+          <a:bodyPr rtlCol="0" anchor="ctr" wrap="square" lIns="228600" tIns="73152"/>
           <a:lstStyle/>
           <a:p>
             <a:pPr algn="ctr"/>
             <a:r>
-              <a:rPr sz="1600" b="0" i="0">
-                <a:solidFill>
-                  <a:srgbClr val="2D2D2D"/>
-                </a:solidFill>
-                <a:latin typeface="Calibri"/>
-              </a:rPr>
-              <a:t>The singer provides
-range, favorites,
-and avoids</a:t>
-            </a:r>
-          </a:p>
-        </p:txBody>
-      </p:sp>
-      <p:sp>
-        <p:nvSpPr>
-          <p:cNvPr id="7" name="Right Arrow 6"/>
+              <a:rPr sz="1700" b="0" i="1">
+                <a:solidFill>
+                  <a:srgbClr val="1A1A1A"/>
+                </a:solidFill>
+                <a:latin typeface="Calibri"/>
+              </a:rPr>
+              <a:t>MusicXML scores parsed with music21: pitch → duration in quarter-note beats.</a:t>
+            </a:r>
+          </a:p>
+        </p:txBody>
+      </p:sp>
+      <p:sp>
+        <p:nvSpPr>
+          <p:cNvPr id="6" name="Rounded Rectangle 5"/>
           <p:cNvSpPr/>
           <p:nvPr/>
         </p:nvSpPr>
         <p:spPr>
           <a:xfrm>
-            <a:off x="2529687" y="2697480"/>
-            <a:ext cx="411480" cy="274320"/>
-          </a:xfrm>
-          <a:prstGeom prst="rightArrow">
+            <a:off x="700887" y="1965960"/>
+            <a:ext cx="1828800" cy="1828800"/>
+          </a:xfrm>
+          <a:prstGeom prst="roundRect">
             <a:avLst/>
           </a:prstGeom>
           <a:solidFill>
-            <a:srgbClr val="C59B3F"/>
+            <a:srgbClr val="0B1F3B"/>
           </a:solidFill>
           <a:ln>
             <a:noFill/>
@@ -7769,29 +8196,79 @@
           </a:fontRef>
         </p:style>
         <p:txBody>
-          <a:bodyPr rtlCol="0" anchor="ctr"/>
+          <a:bodyPr rtlCol="0" anchor="ctr" wrap="square"/>
+          <a:lstStyle/>
+          <a:p>
+            <a:pPr algn="ctr">
+              <a:spcBef>
+                <a:spcPts val="2000"/>
+              </a:spcBef>
+            </a:pPr>
+            <a:r>
+              <a:rPr sz="1800" b="1" i="0">
+                <a:solidFill>
+                  <a:srgbClr val="FFFFFF"/>
+                </a:solidFill>
+                <a:latin typeface="Calibri"/>
+              </a:rPr>
+              <a:t>Singer
+Preferences</a:t>
+            </a:r>
+          </a:p>
+        </p:txBody>
+      </p:sp>
+      <p:sp>
+        <p:nvSpPr>
+          <p:cNvPr id="7" name="TextBox 6"/>
+          <p:cNvSpPr txBox="1"/>
+          <p:nvPr/>
+        </p:nvSpPr>
+        <p:spPr>
+          <a:xfrm>
+            <a:off x="700887" y="3977639"/>
+            <a:ext cx="1828800" cy="1463040"/>
+          </a:xfrm>
+          <a:prstGeom prst="rect">
+            <a:avLst/>
+          </a:prstGeom>
+          <a:noFill/>
+        </p:spPr>
+        <p:txBody>
+          <a:bodyPr wrap="square">
+            <a:spAutoFit/>
+          </a:bodyPr>
           <a:lstStyle/>
           <a:p>
             <a:pPr algn="ctr"/>
-          </a:p>
-        </p:txBody>
-      </p:sp>
-      <p:sp>
-        <p:nvSpPr>
-          <p:cNvPr id="8" name="Rounded Rectangle 7"/>
+            <a:r>
+              <a:rPr sz="1600" b="0" i="0">
+                <a:solidFill>
+                  <a:srgbClr val="1A1A1A"/>
+                </a:solidFill>
+                <a:latin typeface="Calibri"/>
+              </a:rPr>
+              <a:t>Range, favorites,
+and avoids</a:t>
+            </a:r>
+          </a:p>
+        </p:txBody>
+      </p:sp>
+      <p:sp>
+        <p:nvSpPr>
+          <p:cNvPr id="8" name="Right Arrow 7"/>
           <p:cNvSpPr/>
           <p:nvPr/>
         </p:nvSpPr>
         <p:spPr>
           <a:xfrm>
-            <a:off x="2941167" y="1828800"/>
-            <a:ext cx="1828800" cy="2011680"/>
-          </a:xfrm>
-          <a:prstGeom prst="roundRect">
+            <a:off x="2529687" y="2743200"/>
+            <a:ext cx="411480" cy="274320"/>
+          </a:xfrm>
+          <a:prstGeom prst="rightArrow">
             <a:avLst/>
           </a:prstGeom>
           <a:solidFill>
-            <a:srgbClr val="6B1D2A"/>
+            <a:srgbClr val="3FA7A3"/>
           </a:solidFill>
           <a:ln>
             <a:noFill/>
@@ -7812,80 +8289,29 @@
           </a:fontRef>
         </p:style>
         <p:txBody>
-          <a:bodyPr rtlCol="0" anchor="ctr" wrap="square"/>
-          <a:lstStyle/>
-          <a:p>
-            <a:pPr algn="ctr">
-              <a:spcBef>
-                <a:spcPts val="2400"/>
-              </a:spcBef>
-            </a:pPr>
-            <a:r>
-              <a:rPr sz="1800" b="1" i="0">
-                <a:solidFill>
-                  <a:srgbClr val="FFFFFF"/>
-                </a:solidFill>
-                <a:latin typeface="Calibri"/>
-              </a:rPr>
-              <a:t>Range
-Filter</a:t>
-            </a:r>
-          </a:p>
-        </p:txBody>
-      </p:sp>
-      <p:sp>
-        <p:nvSpPr>
-          <p:cNvPr id="9" name="TextBox 8"/>
-          <p:cNvSpPr txBox="1"/>
-          <p:nvPr/>
-        </p:nvSpPr>
-        <p:spPr>
-          <a:xfrm>
-            <a:off x="2941167" y="4023360"/>
-            <a:ext cx="1828800" cy="1463040"/>
-          </a:xfrm>
-          <a:prstGeom prst="rect">
-            <a:avLst/>
-          </a:prstGeom>
-          <a:noFill/>
-        </p:spPr>
-        <p:txBody>
-          <a:bodyPr wrap="square">
-            <a:spAutoFit/>
-          </a:bodyPr>
+          <a:bodyPr rtlCol="0" anchor="ctr"/>
           <a:lstStyle/>
           <a:p>
             <a:pPr algn="ctr"/>
-            <a:r>
-              <a:rPr sz="1600" b="0" i="0">
-                <a:solidFill>
-                  <a:srgbClr val="2D2D2D"/>
-                </a:solidFill>
-                <a:latin typeface="Calibri"/>
-              </a:rPr>
-              <a:t>Remove songs
-outside the
-singer’s range</a:t>
-            </a:r>
-          </a:p>
-        </p:txBody>
-      </p:sp>
-      <p:sp>
-        <p:nvSpPr>
-          <p:cNvPr id="10" name="Right Arrow 9"/>
+          </a:p>
+        </p:txBody>
+      </p:sp>
+      <p:sp>
+        <p:nvSpPr>
+          <p:cNvPr id="9" name="Rounded Rectangle 8"/>
           <p:cNvSpPr/>
           <p:nvPr/>
         </p:nvSpPr>
         <p:spPr>
           <a:xfrm>
-            <a:off x="4769967" y="2697480"/>
-            <a:ext cx="411480" cy="274320"/>
-          </a:xfrm>
-          <a:prstGeom prst="rightArrow">
+            <a:off x="2941167" y="1965960"/>
+            <a:ext cx="1828800" cy="1828800"/>
+          </a:xfrm>
+          <a:prstGeom prst="roundRect">
             <a:avLst/>
           </a:prstGeom>
           <a:solidFill>
-            <a:srgbClr val="C59B3F"/>
+            <a:srgbClr val="0B1F3B"/>
           </a:solidFill>
           <a:ln>
             <a:noFill/>
@@ -7906,29 +8332,79 @@
           </a:fontRef>
         </p:style>
         <p:txBody>
-          <a:bodyPr rtlCol="0" anchor="ctr"/>
+          <a:bodyPr rtlCol="0" anchor="ctr" wrap="square"/>
+          <a:lstStyle/>
+          <a:p>
+            <a:pPr algn="ctr">
+              <a:spcBef>
+                <a:spcPts val="2000"/>
+              </a:spcBef>
+            </a:pPr>
+            <a:r>
+              <a:rPr sz="1800" b="1" i="0">
+                <a:solidFill>
+                  <a:srgbClr val="FFFFFF"/>
+                </a:solidFill>
+                <a:latin typeface="Calibri"/>
+              </a:rPr>
+              <a:t>Range
+Filter</a:t>
+            </a:r>
+          </a:p>
+        </p:txBody>
+      </p:sp>
+      <p:sp>
+        <p:nvSpPr>
+          <p:cNvPr id="10" name="TextBox 9"/>
+          <p:cNvSpPr txBox="1"/>
+          <p:nvPr/>
+        </p:nvSpPr>
+        <p:spPr>
+          <a:xfrm>
+            <a:off x="2941167" y="3977639"/>
+            <a:ext cx="1828800" cy="1463040"/>
+          </a:xfrm>
+          <a:prstGeom prst="rect">
+            <a:avLst/>
+          </a:prstGeom>
+          <a:noFill/>
+        </p:spPr>
+        <p:txBody>
+          <a:bodyPr wrap="square">
+            <a:spAutoFit/>
+          </a:bodyPr>
           <a:lstStyle/>
           <a:p>
             <a:pPr algn="ctr"/>
-          </a:p>
-        </p:txBody>
-      </p:sp>
-      <p:sp>
-        <p:nvSpPr>
-          <p:cNvPr id="11" name="Rounded Rectangle 10"/>
+            <a:r>
+              <a:rPr sz="1600" b="0" i="0">
+                <a:solidFill>
+                  <a:srgbClr val="1A1A1A"/>
+                </a:solidFill>
+                <a:latin typeface="Calibri"/>
+              </a:rPr>
+              <a:t>Drop songs
+outside range</a:t>
+            </a:r>
+          </a:p>
+        </p:txBody>
+      </p:sp>
+      <p:sp>
+        <p:nvSpPr>
+          <p:cNvPr id="11" name="Right Arrow 10"/>
           <p:cNvSpPr/>
           <p:nvPr/>
         </p:nvSpPr>
         <p:spPr>
           <a:xfrm>
-            <a:off x="5181447" y="1828800"/>
-            <a:ext cx="1828800" cy="2011680"/>
-          </a:xfrm>
-          <a:prstGeom prst="roundRect">
+            <a:off x="4769967" y="2743200"/>
+            <a:ext cx="411480" cy="274320"/>
+          </a:xfrm>
+          <a:prstGeom prst="rightArrow">
             <a:avLst/>
           </a:prstGeom>
           <a:solidFill>
-            <a:srgbClr val="6B1D2A"/>
+            <a:srgbClr val="3FA7A3"/>
           </a:solidFill>
           <a:ln>
             <a:noFill/>
@@ -7949,80 +8425,29 @@
           </a:fontRef>
         </p:style>
         <p:txBody>
-          <a:bodyPr rtlCol="0" anchor="ctr" wrap="square"/>
-          <a:lstStyle/>
-          <a:p>
-            <a:pPr algn="ctr">
-              <a:spcBef>
-                <a:spcPts val="2400"/>
-              </a:spcBef>
-            </a:pPr>
-            <a:r>
-              <a:rPr sz="1800" b="1" i="0">
-                <a:solidFill>
-                  <a:srgbClr val="FFFFFF"/>
-                </a:solidFill>
-                <a:latin typeface="Calibri"/>
-              </a:rPr>
-              <a:t>Ideal Profile
-Construction</a:t>
-            </a:r>
-          </a:p>
-        </p:txBody>
-      </p:sp>
-      <p:sp>
-        <p:nvSpPr>
-          <p:cNvPr id="12" name="TextBox 11"/>
-          <p:cNvSpPr txBox="1"/>
-          <p:nvPr/>
-        </p:nvSpPr>
-        <p:spPr>
-          <a:xfrm>
-            <a:off x="5181447" y="4023360"/>
-            <a:ext cx="1828800" cy="1463040"/>
-          </a:xfrm>
-          <a:prstGeom prst="rect">
-            <a:avLst/>
-          </a:prstGeom>
-          <a:noFill/>
-        </p:spPr>
-        <p:txBody>
-          <a:bodyPr wrap="square">
-            <a:spAutoFit/>
-          </a:bodyPr>
+          <a:bodyPr rtlCol="0" anchor="ctr"/>
           <a:lstStyle/>
           <a:p>
             <a:pPr algn="ctr"/>
-            <a:r>
-              <a:rPr sz="1600" b="0" i="0">
-                <a:solidFill>
-                  <a:srgbClr val="2D2D2D"/>
-                </a:solidFill>
-                <a:latin typeface="Calibri"/>
-              </a:rPr>
-              <a:t>Build a target
-pitch-duration
-vector</a:t>
-            </a:r>
-          </a:p>
-        </p:txBody>
-      </p:sp>
-      <p:sp>
-        <p:nvSpPr>
-          <p:cNvPr id="13" name="Right Arrow 12"/>
+          </a:p>
+        </p:txBody>
+      </p:sp>
+      <p:sp>
+        <p:nvSpPr>
+          <p:cNvPr id="12" name="Rounded Rectangle 11"/>
           <p:cNvSpPr/>
           <p:nvPr/>
         </p:nvSpPr>
         <p:spPr>
           <a:xfrm>
-            <a:off x="7010247" y="2697480"/>
-            <a:ext cx="411480" cy="274320"/>
-          </a:xfrm>
-          <a:prstGeom prst="rightArrow">
+            <a:off x="5181447" y="1965960"/>
+            <a:ext cx="1828800" cy="1828800"/>
+          </a:xfrm>
+          <a:prstGeom prst="roundRect">
             <a:avLst/>
           </a:prstGeom>
           <a:solidFill>
-            <a:srgbClr val="C59B3F"/>
+            <a:srgbClr val="0B1F3B"/>
           </a:solidFill>
           <a:ln>
             <a:noFill/>
@@ -8043,29 +8468,79 @@
           </a:fontRef>
         </p:style>
         <p:txBody>
-          <a:bodyPr rtlCol="0" anchor="ctr"/>
+          <a:bodyPr rtlCol="0" anchor="ctr" wrap="square"/>
+          <a:lstStyle/>
+          <a:p>
+            <a:pPr algn="ctr">
+              <a:spcBef>
+                <a:spcPts val="2000"/>
+              </a:spcBef>
+            </a:pPr>
+            <a:r>
+              <a:rPr sz="1800" b="1" i="0">
+                <a:solidFill>
+                  <a:srgbClr val="FFFFFF"/>
+                </a:solidFill>
+                <a:latin typeface="Calibri"/>
+              </a:rPr>
+              <a:t>Ideal Profile
+Construction</a:t>
+            </a:r>
+          </a:p>
+        </p:txBody>
+      </p:sp>
+      <p:sp>
+        <p:nvSpPr>
+          <p:cNvPr id="13" name="TextBox 12"/>
+          <p:cNvSpPr txBox="1"/>
+          <p:nvPr/>
+        </p:nvSpPr>
+        <p:spPr>
+          <a:xfrm>
+            <a:off x="5181447" y="3977639"/>
+            <a:ext cx="1828800" cy="1463040"/>
+          </a:xfrm>
+          <a:prstGeom prst="rect">
+            <a:avLst/>
+          </a:prstGeom>
+          <a:noFill/>
+        </p:spPr>
+        <p:txBody>
+          <a:bodyPr wrap="square">
+            <a:spAutoFit/>
+          </a:bodyPr>
           <a:lstStyle/>
           <a:p>
             <a:pPr algn="ctr"/>
-          </a:p>
-        </p:txBody>
-      </p:sp>
-      <p:sp>
-        <p:nvSpPr>
-          <p:cNvPr id="14" name="Rounded Rectangle 13"/>
+            <a:r>
+              <a:rPr sz="1600" b="0" i="0">
+                <a:solidFill>
+                  <a:srgbClr val="1A1A1A"/>
+                </a:solidFill>
+                <a:latin typeface="Calibri"/>
+              </a:rPr>
+              <a:t>Target profile
+from preferences</a:t>
+            </a:r>
+          </a:p>
+        </p:txBody>
+      </p:sp>
+      <p:sp>
+        <p:nvSpPr>
+          <p:cNvPr id="14" name="Right Arrow 13"/>
           <p:cNvSpPr/>
           <p:nvPr/>
         </p:nvSpPr>
         <p:spPr>
           <a:xfrm>
-            <a:off x="7421727" y="1828800"/>
-            <a:ext cx="1828800" cy="2011680"/>
-          </a:xfrm>
-          <a:prstGeom prst="roundRect">
+            <a:off x="7010247" y="2743200"/>
+            <a:ext cx="411480" cy="274320"/>
+          </a:xfrm>
+          <a:prstGeom prst="rightArrow">
             <a:avLst/>
           </a:prstGeom>
           <a:solidFill>
-            <a:srgbClr val="6B1D2A"/>
+            <a:srgbClr val="3FA7A3"/>
           </a:solidFill>
           <a:ln>
             <a:noFill/>
@@ -8086,81 +8561,29 @@
           </a:fontRef>
         </p:style>
         <p:txBody>
-          <a:bodyPr rtlCol="0" anchor="ctr" wrap="square"/>
-          <a:lstStyle/>
-          <a:p>
-            <a:pPr algn="ctr">
-              <a:spcBef>
-                <a:spcPts val="2400"/>
-              </a:spcBef>
-            </a:pPr>
-            <a:r>
-              <a:rPr sz="1800" b="1" i="0">
-                <a:solidFill>
-                  <a:srgbClr val="FFFFFF"/>
-                </a:solidFill>
-                <a:latin typeface="Calibri"/>
-              </a:rPr>
-              <a:t>Cosine
-Similarity
-Scoring</a:t>
-            </a:r>
-          </a:p>
-        </p:txBody>
-      </p:sp>
-      <p:sp>
-        <p:nvSpPr>
-          <p:cNvPr id="15" name="TextBox 14"/>
-          <p:cNvSpPr txBox="1"/>
-          <p:nvPr/>
-        </p:nvSpPr>
-        <p:spPr>
-          <a:xfrm>
-            <a:off x="7421727" y="4023360"/>
-            <a:ext cx="1828800" cy="1463040"/>
-          </a:xfrm>
-          <a:prstGeom prst="rect">
-            <a:avLst/>
-          </a:prstGeom>
-          <a:noFill/>
-        </p:spPr>
-        <p:txBody>
-          <a:bodyPr wrap="square">
-            <a:spAutoFit/>
-          </a:bodyPr>
+          <a:bodyPr rtlCol="0" anchor="ctr"/>
           <a:lstStyle/>
           <a:p>
             <a:pPr algn="ctr"/>
-            <a:r>
-              <a:rPr sz="1600" b="0" i="0">
-                <a:solidFill>
-                  <a:srgbClr val="2D2D2D"/>
-                </a:solidFill>
-                <a:latin typeface="Calibri"/>
-              </a:rPr>
-              <a:t>Score each song
-by similarity
-minus avoid penalty</a:t>
-            </a:r>
-          </a:p>
-        </p:txBody>
-      </p:sp>
-      <p:sp>
-        <p:nvSpPr>
-          <p:cNvPr id="16" name="Right Arrow 15"/>
+          </a:p>
+        </p:txBody>
+      </p:sp>
+      <p:sp>
+        <p:nvSpPr>
+          <p:cNvPr id="15" name="Rounded Rectangle 14"/>
           <p:cNvSpPr/>
           <p:nvPr/>
         </p:nvSpPr>
         <p:spPr>
           <a:xfrm>
-            <a:off x="9250527" y="2697480"/>
-            <a:ext cx="411480" cy="274320"/>
-          </a:xfrm>
-          <a:prstGeom prst="rightArrow">
+            <a:off x="7421727" y="1965960"/>
+            <a:ext cx="1828800" cy="1828800"/>
+          </a:xfrm>
+          <a:prstGeom prst="roundRect">
             <a:avLst/>
           </a:prstGeom>
           <a:solidFill>
-            <a:srgbClr val="C59B3F"/>
+            <a:srgbClr val="0B1F3B"/>
           </a:solidFill>
           <a:ln>
             <a:noFill/>
@@ -8181,29 +8604,80 @@
           </a:fontRef>
         </p:style>
         <p:txBody>
-          <a:bodyPr rtlCol="0" anchor="ctr"/>
+          <a:bodyPr rtlCol="0" anchor="ctr" wrap="square"/>
+          <a:lstStyle/>
+          <a:p>
+            <a:pPr algn="ctr">
+              <a:spcBef>
+                <a:spcPts val="2000"/>
+              </a:spcBef>
+            </a:pPr>
+            <a:r>
+              <a:rPr sz="1800" b="1" i="0">
+                <a:solidFill>
+                  <a:srgbClr val="FFFFFF"/>
+                </a:solidFill>
+                <a:latin typeface="Calibri"/>
+              </a:rPr>
+              <a:t>Cosine
+Similarity
+Scoring</a:t>
+            </a:r>
+          </a:p>
+        </p:txBody>
+      </p:sp>
+      <p:sp>
+        <p:nvSpPr>
+          <p:cNvPr id="16" name="TextBox 15"/>
+          <p:cNvSpPr txBox="1"/>
+          <p:nvPr/>
+        </p:nvSpPr>
+        <p:spPr>
+          <a:xfrm>
+            <a:off x="7421727" y="3977639"/>
+            <a:ext cx="1828800" cy="1463040"/>
+          </a:xfrm>
+          <a:prstGeom prst="rect">
+            <a:avLst/>
+          </a:prstGeom>
+          <a:noFill/>
+        </p:spPr>
+        <p:txBody>
+          <a:bodyPr wrap="square">
+            <a:spAutoFit/>
+          </a:bodyPr>
           <a:lstStyle/>
           <a:p>
             <a:pPr algn="ctr"/>
-          </a:p>
-        </p:txBody>
-      </p:sp>
-      <p:sp>
-        <p:nvSpPr>
-          <p:cNvPr id="17" name="Rounded Rectangle 16"/>
+            <a:r>
+              <a:rPr sz="1600" b="0" i="0">
+                <a:solidFill>
+                  <a:srgbClr val="1A1A1A"/>
+                </a:solidFill>
+                <a:latin typeface="Calibri"/>
+              </a:rPr>
+              <a:t>Similarity minus
+avoid penalty</a:t>
+            </a:r>
+          </a:p>
+        </p:txBody>
+      </p:sp>
+      <p:sp>
+        <p:nvSpPr>
+          <p:cNvPr id="17" name="Right Arrow 16"/>
           <p:cNvSpPr/>
           <p:nvPr/>
         </p:nvSpPr>
         <p:spPr>
           <a:xfrm>
-            <a:off x="9662007" y="1828800"/>
-            <a:ext cx="1828800" cy="2011680"/>
-          </a:xfrm>
-          <a:prstGeom prst="roundRect">
+            <a:off x="9250527" y="2743200"/>
+            <a:ext cx="411480" cy="274320"/>
+          </a:xfrm>
+          <a:prstGeom prst="rightArrow">
             <a:avLst/>
           </a:prstGeom>
           <a:solidFill>
-            <a:srgbClr val="6B1D2A"/>
+            <a:srgbClr val="3FA7A3"/>
           </a:solidFill>
           <a:ln>
             <a:noFill/>
@@ -8224,12 +8698,55 @@
           </a:fontRef>
         </p:style>
         <p:txBody>
+          <a:bodyPr rtlCol="0" anchor="ctr"/>
+          <a:lstStyle/>
+          <a:p>
+            <a:pPr algn="ctr"/>
+          </a:p>
+        </p:txBody>
+      </p:sp>
+      <p:sp>
+        <p:nvSpPr>
+          <p:cNvPr id="18" name="Rounded Rectangle 17"/>
+          <p:cNvSpPr/>
+          <p:nvPr/>
+        </p:nvSpPr>
+        <p:spPr>
+          <a:xfrm>
+            <a:off x="9662007" y="1965960"/>
+            <a:ext cx="1828800" cy="1828800"/>
+          </a:xfrm>
+          <a:prstGeom prst="roundRect">
+            <a:avLst/>
+          </a:prstGeom>
+          <a:solidFill>
+            <a:srgbClr val="0B1F3B"/>
+          </a:solidFill>
+          <a:ln>
+            <a:noFill/>
+          </a:ln>
+        </p:spPr>
+        <p:style>
+          <a:lnRef idx="1">
+            <a:schemeClr val="accent1"/>
+          </a:lnRef>
+          <a:fillRef idx="3">
+            <a:schemeClr val="accent1"/>
+          </a:fillRef>
+          <a:effectRef idx="2">
+            <a:schemeClr val="accent1"/>
+          </a:effectRef>
+          <a:fontRef idx="minor">
+            <a:schemeClr val="lt1"/>
+          </a:fontRef>
+        </p:style>
+        <p:txBody>
           <a:bodyPr rtlCol="0" anchor="ctr" wrap="square"/>
           <a:lstStyle/>
           <a:p>
             <a:pPr algn="ctr">
               <a:spcBef>
-                <a:spcPts val="2400"/>
+                <a:spcPts val="2000"/>
               </a:spcBef>
             </a:pPr>
             <a:r>
@@ -8247,13 +8764,13 @@
       </p:sp>
       <p:sp>
         <p:nvSpPr>
-          <p:cNvPr id="18" name="TextBox 17"/>
+          <p:cNvPr id="19" name="TextBox 18"/>
           <p:cNvSpPr txBox="1"/>
           <p:nvPr/>
         </p:nvSpPr>
         <p:spPr>
           <a:xfrm>
-            <a:off x="9662007" y="4023360"/>
+            <a:off x="9662007" y="3977639"/>
             <a:ext cx="1828800" cy="1463040"/>
           </a:xfrm>
           <a:prstGeom prst="rect">
@@ -8271,12 +8788,11 @@
             <a:r>
               <a:rPr sz="1600" b="0" i="0">
                 <a:solidFill>
-                  <a:srgbClr val="2D2D2D"/>
-                </a:solidFill>
-                <a:latin typeface="Calibri"/>
-              </a:rPr>
-              <a:t>Songs ordered
-from best match
+                  <a:srgbClr val="1A1A1A"/>
+                </a:solidFill>
+                <a:latin typeface="Calibri"/>
+              </a:rPr>
+              <a:t>Best match
 to worst</a:t>
             </a:r>
           </a:p>
@@ -8284,7 +8800,7 @@
       </p:sp>
       <p:sp>
         <p:nvSpPr>
-          <p:cNvPr id="19" name="TextBox 18"/>
+          <p:cNvPr id="20" name="TextBox 19"/>
           <p:cNvSpPr txBox="1"/>
           <p:nvPr/>
         </p:nvSpPr>
@@ -8308,11 +8824,11 @@
             <a:r>
               <a:rPr sz="2200" b="0" i="1">
                 <a:solidFill>
-                  <a:srgbClr val="6B1D2A"/>
-                </a:solidFill>
-                <a:latin typeface="Calibri"/>
-              </a:rPr>
-              <a:t>The singer tells us three things: range, favorite pitches, and pitches to avoid. We do the rest.</a:t>
+                  <a:srgbClr val="0B1F3B"/>
+                </a:solidFill>
+                <a:latin typeface="Calibri"/>
+              </a:rPr>
+              <a:t>Three inputs: range, favorites, avoids. We do the rest.</a:t>
             </a:r>
           </a:p>
         </p:txBody>
@@ -8331,7 +8847,7 @@
     <p:bg>
       <p:bgPr>
         <a:solidFill>
-          <a:srgbClr val="FDF6EC"/>
+          <a:srgbClr val="FFFFFF"/>
         </a:solidFill>
         <a:effectLst/>
       </p:bgPr>
@@ -8358,7 +8874,7 @@
             <a:avLst/>
           </a:prstGeom>
           <a:solidFill>
-            <a:srgbClr val="6B1D2A"/>
+            <a:srgbClr val="0B1F3B"/>
           </a:solidFill>
           <a:ln>
             <a:noFill/>
@@ -8436,7 +8952,7 @@
             <a:avLst/>
           </a:prstGeom>
           <a:solidFill>
-            <a:srgbClr val="C59B3F"/>
+            <a:srgbClr val="FF5D7A"/>
           </a:solidFill>
           <a:ln>
             <a:noFill/>
@@ -8472,14 +8988,14 @@
         </p:nvSpPr>
         <p:spPr>
           <a:xfrm>
-            <a:off x="1371600" y="1554480"/>
-            <a:ext cx="9448495" cy="1097280"/>
+            <a:off x="685800" y="1325880"/>
+            <a:ext cx="10789920" cy="914400"/>
           </a:xfrm>
           <a:prstGeom prst="roundRect">
             <a:avLst/>
           </a:prstGeom>
           <a:solidFill>
-            <a:srgbClr val="6B1D2A"/>
+            <a:srgbClr val="0B1F3B"/>
           </a:solidFill>
           <a:ln>
             <a:noFill/>
@@ -8500,12 +9016,12 @@
           </a:fontRef>
         </p:style>
         <p:txBody>
-          <a:bodyPr rtlCol="0" anchor="ctr" wrap="square"/>
+          <a:bodyPr rtlCol="0" anchor="ctr" wrap="square" tIns="109728"/>
           <a:lstStyle/>
           <a:p>
             <a:pPr algn="ctr"/>
             <a:r>
-              <a:rPr sz="2600" b="1" i="0">
+              <a:rPr sz="2400" b="1" i="0">
                 <a:solidFill>
                   <a:srgbClr val="FFFFFF"/>
                 </a:solidFill>
@@ -8518,97 +9034,24 @@
       </p:sp>
       <p:sp>
         <p:nvSpPr>
-          <p:cNvPr id="6" name="TextBox 5"/>
-          <p:cNvSpPr txBox="1"/>
-          <p:nvPr/>
-        </p:nvSpPr>
-        <p:spPr>
-          <a:xfrm>
-            <a:off x="685800" y="2926080"/>
-            <a:ext cx="10789920" cy="2286000"/>
-          </a:xfrm>
-          <a:prstGeom prst="rect">
-            <a:avLst/>
-          </a:prstGeom>
-          <a:noFill/>
-        </p:spPr>
-        <p:txBody>
-          <a:bodyPr wrap="square">
-            <a:spAutoFit/>
-          </a:bodyPr>
-          <a:lstStyle/>
-          <a:p>
-            <a:pPr algn="l">
-              <a:spcAft>
-                <a:spcPts val="800"/>
-              </a:spcAft>
-            </a:pPr>
-            <a:r>
-              <a:rPr sz="2200" b="0" i="0">
-                <a:solidFill>
-                  <a:srgbClr val="2D2D2D"/>
-                </a:solidFill>
-                <a:latin typeface="Calibri"/>
-              </a:rPr>
-              <a:t>  •  Cosine similarity: how closely does this song’s pitch fingerprint
-align with the singer’s ideal profile? (1.0 = perfect match)</a:t>
-            </a:r>
-          </a:p>
-          <a:p>
-            <a:pPr algn="l">
-              <a:spcAft>
-                <a:spcPts val="800"/>
-              </a:spcAft>
-            </a:pPr>
-            <a:r>
-              <a:rPr sz="2200" b="0" i="0">
-                <a:solidFill>
-                  <a:srgbClr val="2D2D2D"/>
-                </a:solidFill>
-                <a:latin typeface="Calibri"/>
-              </a:rPr>
-              <a:t>  •  Avoid penalty: what proportion of the song’s duration is spent
-on notes the singer wants to avoid?</a:t>
-            </a:r>
-          </a:p>
-          <a:p>
-            <a:pPr algn="l">
-              <a:spcAft>
-                <a:spcPts val="800"/>
-              </a:spcAft>
-            </a:pPr>
-            <a:r>
-              <a:rPr sz="2200" b="0" i="0">
-                <a:solidFill>
-                  <a:srgbClr val="2D2D2D"/>
-                </a:solidFill>
-                <a:latin typeface="Calibri"/>
-              </a:rPr>
-              <a:t>  •  α (alpha = 0.5): controls how heavily we penalize avoided notes.</a:t>
-            </a:r>
-          </a:p>
-        </p:txBody>
-      </p:sp>
-      <p:sp>
-        <p:nvSpPr>
-          <p:cNvPr id="7" name="Rounded Rectangle 6"/>
+          <p:cNvPr id="6" name="Rounded Rectangle 5"/>
           <p:cNvSpPr/>
           <p:nvPr/>
         </p:nvSpPr>
         <p:spPr>
           <a:xfrm>
-            <a:off x="685800" y="5212080"/>
-            <a:ext cx="10789920" cy="1097280"/>
+            <a:off x="700887" y="2468880"/>
+            <a:ext cx="3383280" cy="2560320"/>
           </a:xfrm>
           <a:prstGeom prst="roundRect">
             <a:avLst/>
           </a:prstGeom>
           <a:solidFill>
-            <a:srgbClr val="F5E6C4"/>
+            <a:srgbClr val="F4F6F8"/>
           </a:solidFill>
-          <a:ln w="19050">
+          <a:ln w="25400">
             <a:solidFill>
-              <a:srgbClr val="C59B3F"/>
+              <a:srgbClr val="3FA7A3"/>
             </a:solidFill>
           </a:ln>
         </p:spPr>
@@ -8627,18 +9070,180 @@
           </a:fontRef>
         </p:style>
         <p:txBody>
-          <a:bodyPr rtlCol="0" anchor="ctr" wrap="square" lIns="274320" tIns="137160"/>
+          <a:bodyPr rtlCol="0" anchor="ctr" wrap="square" lIns="182880" rIns="182880" tIns="137160"/>
           <a:lstStyle/>
           <a:p>
             <a:pPr algn="ctr"/>
             <a:r>
-              <a:rPr sz="2000" b="0" i="1">
-                <a:solidFill>
-                  <a:srgbClr val="2D2D2D"/>
-                </a:solidFill>
-                <a:latin typeface="Calibri"/>
-              </a:rPr>
-              <a:t>Analogy:  Like a restaurant recommender that matches your food preferences and subtracts points for ingredients you dislike.</a:t>
+              <a:rPr sz="1800" b="1" i="0">
+                <a:solidFill>
+                  <a:srgbClr val="3FA7A3"/>
+                </a:solidFill>
+                <a:latin typeface="Calibri"/>
+              </a:rPr>
+              <a:t>Cosine Similarity</a:t>
+            </a:r>
+          </a:p>
+          <a:p>
+            <a:pPr algn="ctr">
+              <a:spcBef>
+                <a:spcPts val="1000"/>
+              </a:spcBef>
+            </a:pPr>
+            <a:r>
+              <a:rPr sz="1500" b="0" i="0">
+                <a:solidFill>
+                  <a:srgbClr val="1A1A1A"/>
+                </a:solidFill>
+                <a:latin typeface="Calibri"/>
+              </a:rPr>
+              <a:t>Same pitches, same proportions?
+1.0 = perfect match</a:t>
+            </a:r>
+          </a:p>
+        </p:txBody>
+      </p:sp>
+      <p:sp>
+        <p:nvSpPr>
+          <p:cNvPr id="7" name="Rounded Rectangle 6"/>
+          <p:cNvSpPr/>
+          <p:nvPr/>
+        </p:nvSpPr>
+        <p:spPr>
+          <a:xfrm>
+            <a:off x="4404207" y="2468880"/>
+            <a:ext cx="3383280" cy="2560320"/>
+          </a:xfrm>
+          <a:prstGeom prst="roundRect">
+            <a:avLst/>
+          </a:prstGeom>
+          <a:solidFill>
+            <a:srgbClr val="F4F6F8"/>
+          </a:solidFill>
+          <a:ln w="25400">
+            <a:solidFill>
+              <a:srgbClr val="FF5D7A"/>
+            </a:solidFill>
+          </a:ln>
+        </p:spPr>
+        <p:style>
+          <a:lnRef idx="1">
+            <a:schemeClr val="accent1"/>
+          </a:lnRef>
+          <a:fillRef idx="3">
+            <a:schemeClr val="accent1"/>
+          </a:fillRef>
+          <a:effectRef idx="2">
+            <a:schemeClr val="accent1"/>
+          </a:effectRef>
+          <a:fontRef idx="minor">
+            <a:schemeClr val="lt1"/>
+          </a:fontRef>
+        </p:style>
+        <p:txBody>
+          <a:bodyPr rtlCol="0" anchor="ctr" wrap="square" lIns="182880" rIns="182880" tIns="137160"/>
+          <a:lstStyle/>
+          <a:p>
+            <a:pPr algn="ctr"/>
+            <a:r>
+              <a:rPr sz="1800" b="1" i="0">
+                <a:solidFill>
+                  <a:srgbClr val="FF5D7A"/>
+                </a:solidFill>
+                <a:latin typeface="Calibri"/>
+              </a:rPr>
+              <a:t>Avoid Penalty</a:t>
+            </a:r>
+          </a:p>
+          <a:p>
+            <a:pPr algn="ctr">
+              <a:spcBef>
+                <a:spcPts val="1000"/>
+              </a:spcBef>
+            </a:pPr>
+            <a:r>
+              <a:rPr sz="1500" b="0" i="0">
+                <a:solidFill>
+                  <a:srgbClr val="1A1A1A"/>
+                </a:solidFill>
+                <a:latin typeface="Calibri"/>
+              </a:rPr>
+              <a:t>Share of singing time on
+pitches the singer avoids.
+Higher = worse fit</a:t>
+            </a:r>
+          </a:p>
+        </p:txBody>
+      </p:sp>
+      <p:sp>
+        <p:nvSpPr>
+          <p:cNvPr id="8" name="Rounded Rectangle 7"/>
+          <p:cNvSpPr/>
+          <p:nvPr/>
+        </p:nvSpPr>
+        <p:spPr>
+          <a:xfrm>
+            <a:off x="8107527" y="2468880"/>
+            <a:ext cx="3383280" cy="2560320"/>
+          </a:xfrm>
+          <a:prstGeom prst="roundRect">
+            <a:avLst/>
+          </a:prstGeom>
+          <a:solidFill>
+            <a:srgbClr val="F4F6F8"/>
+          </a:solidFill>
+          <a:ln w="25400">
+            <a:solidFill>
+              <a:srgbClr val="2E4A7D"/>
+            </a:solidFill>
+          </a:ln>
+        </p:spPr>
+        <p:style>
+          <a:lnRef idx="1">
+            <a:schemeClr val="accent1"/>
+          </a:lnRef>
+          <a:fillRef idx="3">
+            <a:schemeClr val="accent1"/>
+          </a:fillRef>
+          <a:effectRef idx="2">
+            <a:schemeClr val="accent1"/>
+          </a:effectRef>
+          <a:fontRef idx="minor">
+            <a:schemeClr val="lt1"/>
+          </a:fontRef>
+        </p:style>
+        <p:txBody>
+          <a:bodyPr rtlCol="0" anchor="ctr" wrap="square" lIns="182880" rIns="182880" tIns="137160"/>
+          <a:lstStyle/>
+          <a:p>
+            <a:pPr algn="ctr"/>
+            <a:r>
+              <a:rPr sz="1800" b="1" i="0">
+                <a:solidFill>
+                  <a:srgbClr val="2E4A7D"/>
+                </a:solidFill>
+                <a:latin typeface="Calibri"/>
+              </a:rPr>
+              <a:t>α  (Alpha = 0.5)</a:t>
+            </a:r>
+          </a:p>
+          <a:p>
+            <a:pPr algn="ctr">
+              <a:spcBef>
+                <a:spcPts val="1000"/>
+              </a:spcBef>
+            </a:pPr>
+            <a:r>
+              <a:rPr sz="1500" b="0" i="0">
+                <a:solidFill>
+                  <a:srgbClr val="1A1A1A"/>
+                </a:solidFill>
+                <a:latin typeface="Calibri"/>
+              </a:rPr>
+              <a:t>Balances rewarding good
+pitches vs. penalizing
+avoided ones.
+0.5 = even split</a:t>
             </a:r>
           </a:p>
         </p:txBody>
@@ -8657,7 +9262,7 @@
     <p:bg>
       <p:bgPr>
         <a:solidFill>
-          <a:srgbClr val="FDF6EC"/>
+          <a:srgbClr val="FFFFFF"/>
         </a:solidFill>
         <a:effectLst/>
       </p:bgPr>
@@ -8684,7 +9289,7 @@
             <a:avLst/>
           </a:prstGeom>
           <a:solidFill>
-            <a:srgbClr val="6B1D2A"/>
+            <a:srgbClr val="0B1F3B"/>
           </a:solidFill>
           <a:ln>
             <a:noFill/>
@@ -8762,7 +9367,7 @@
             <a:avLst/>
           </a:prstGeom>
           <a:solidFill>
-            <a:srgbClr val="C59B3F"/>
+            <a:srgbClr val="FF5D7A"/>
           </a:solidFill>
           <a:ln>
             <a:noFill/>
@@ -8792,14 +9397,270 @@
       </p:sp>
       <p:sp>
         <p:nvSpPr>
-          <p:cNvPr id="5" name="TextBox 4"/>
+          <p:cNvPr id="5" name="Rounded Rectangle 4"/>
+          <p:cNvSpPr/>
+          <p:nvPr/>
+        </p:nvSpPr>
+        <p:spPr>
+          <a:xfrm>
+            <a:off x="685800" y="1325880"/>
+            <a:ext cx="10789920" cy="777240"/>
+          </a:xfrm>
+          <a:prstGeom prst="roundRect">
+            <a:avLst/>
+          </a:prstGeom>
+          <a:solidFill>
+            <a:srgbClr val="F4F6F8"/>
+          </a:solidFill>
+          <a:ln w="15240">
+            <a:solidFill>
+              <a:srgbClr val="3FA7A3"/>
+            </a:solidFill>
+          </a:ln>
+        </p:spPr>
+        <p:style>
+          <a:lnRef idx="1">
+            <a:schemeClr val="accent1"/>
+          </a:lnRef>
+          <a:fillRef idx="3">
+            <a:schemeClr val="accent1"/>
+          </a:fillRef>
+          <a:effectRef idx="2">
+            <a:schemeClr val="accent1"/>
+          </a:effectRef>
+          <a:fontRef idx="minor">
+            <a:schemeClr val="lt1"/>
+          </a:fontRef>
+        </p:style>
+        <p:txBody>
+          <a:bodyPr rtlCol="0" anchor="ctr" wrap="square" lIns="274320" tIns="91440"/>
+          <a:lstStyle/>
+          <a:p>
+            <a:pPr algn="ctr"/>
+            <a:r>
+              <a:rPr sz="1900" b="0" i="1">
+                <a:solidFill>
+                  <a:srgbClr val="1A1A1A"/>
+                </a:solidFill>
+                <a:latin typeface="Calibri"/>
+              </a:rPr>
+              <a:t>OpenScore Lieder Corpus  —  CC0-licensed art-song scores</a:t>
+            </a:r>
+          </a:p>
+        </p:txBody>
+      </p:sp>
+      <p:sp>
+        <p:nvSpPr>
+          <p:cNvPr id="6" name="Rounded Rectangle 5"/>
+          <p:cNvSpPr/>
+          <p:nvPr/>
+        </p:nvSpPr>
+        <p:spPr>
+          <a:xfrm>
+            <a:off x="502920" y="2377440"/>
+            <a:ext cx="5120640" cy="3291840"/>
+          </a:xfrm>
+          <a:prstGeom prst="roundRect">
+            <a:avLst/>
+          </a:prstGeom>
+          <a:solidFill>
+            <a:srgbClr val="F4F6F8"/>
+          </a:solidFill>
+          <a:ln w="15240">
+            <a:solidFill>
+              <a:srgbClr val="2E4A7D"/>
+            </a:solidFill>
+          </a:ln>
+        </p:spPr>
+        <p:style>
+          <a:lnRef idx="1">
+            <a:schemeClr val="accent1"/>
+          </a:lnRef>
+          <a:fillRef idx="3">
+            <a:schemeClr val="accent1"/>
+          </a:fillRef>
+          <a:effectRef idx="2">
+            <a:schemeClr val="accent1"/>
+          </a:effectRef>
+          <a:fontRef idx="minor">
+            <a:schemeClr val="lt1"/>
+          </a:fontRef>
+        </p:style>
+        <p:txBody>
+          <a:bodyPr rtlCol="0" anchor="ctr" wrap="square" lIns="274320" rIns="228600" tIns="182880"/>
+          <a:lstStyle/>
+          <a:p>
+            <a:pPr algn="l"/>
+            <a:r>
+              <a:rPr sz="2000" b="1" i="0">
+                <a:solidFill>
+                  <a:srgbClr val="2E4A7D"/>
+                </a:solidFill>
+                <a:latin typeface="Calibri"/>
+              </a:rPr>
+              <a:t>Experiment 1  —  Compact Library</a:t>
+            </a:r>
+          </a:p>
+          <a:p>
+            <a:pPr>
+              <a:spcBef>
+                <a:spcPts val="1200"/>
+              </a:spcBef>
+            </a:pPr>
+            <a:r>
+              <a:rPr sz="1800" b="0" i="0">
+                <a:solidFill>
+                  <a:srgbClr val="1A1A1A"/>
+                </a:solidFill>
+                <a:latin typeface="Calibri"/>
+              </a:rPr>
+              <a:t>  •  101 vocal lines</a:t>
+            </a:r>
+          </a:p>
+          <a:p>
+            <a:pPr>
+              <a:spcBef>
+                <a:spcPts val="1200"/>
+              </a:spcBef>
+            </a:pPr>
+            <a:r>
+              <a:rPr sz="1800" b="0" i="0">
+                <a:solidFill>
+                  <a:srgbClr val="1A1A1A"/>
+                </a:solidFill>
+                <a:latin typeface="Calibri"/>
+              </a:rPr>
+              <a:t>  •  One per composition</a:t>
+            </a:r>
+          </a:p>
+          <a:p>
+            <a:pPr>
+              <a:spcBef>
+                <a:spcPts val="1200"/>
+              </a:spcBef>
+            </a:pPr>
+            <a:r>
+              <a:rPr sz="1800" b="0" i="0">
+                <a:solidFill>
+                  <a:srgbClr val="1A1A1A"/>
+                </a:solidFill>
+                <a:latin typeface="Calibri"/>
+              </a:rPr>
+              <a:t>  •  Initial validation baseline</a:t>
+            </a:r>
+          </a:p>
+        </p:txBody>
+      </p:sp>
+      <p:sp>
+        <p:nvSpPr>
+          <p:cNvPr id="7" name="Rounded Rectangle 6"/>
+          <p:cNvSpPr/>
+          <p:nvPr/>
+        </p:nvSpPr>
+        <p:spPr>
+          <a:xfrm>
+            <a:off x="6355080" y="2377440"/>
+            <a:ext cx="5120640" cy="3291840"/>
+          </a:xfrm>
+          <a:prstGeom prst="roundRect">
+            <a:avLst/>
+          </a:prstGeom>
+          <a:solidFill>
+            <a:srgbClr val="0B1F3B"/>
+          </a:solidFill>
+          <a:ln>
+            <a:noFill/>
+          </a:ln>
+        </p:spPr>
+        <p:style>
+          <a:lnRef idx="1">
+            <a:schemeClr val="accent1"/>
+          </a:lnRef>
+          <a:fillRef idx="3">
+            <a:schemeClr val="accent1"/>
+          </a:fillRef>
+          <a:effectRef idx="2">
+            <a:schemeClr val="accent1"/>
+          </a:effectRef>
+          <a:fontRef idx="minor">
+            <a:schemeClr val="lt1"/>
+          </a:fontRef>
+        </p:style>
+        <p:txBody>
+          <a:bodyPr rtlCol="0" anchor="ctr" wrap="square" lIns="274320" rIns="228600" tIns="182880"/>
+          <a:lstStyle/>
+          <a:p>
+            <a:pPr algn="l"/>
+            <a:r>
+              <a:rPr sz="2000" b="1" i="0">
+                <a:solidFill>
+                  <a:srgbClr val="FF5D7A"/>
+                </a:solidFill>
+                <a:latin typeface="Calibri"/>
+              </a:rPr>
+              <a:t>Experiment 2  —  Expanded Library</a:t>
+            </a:r>
+          </a:p>
+          <a:p>
+            <a:pPr>
+              <a:spcBef>
+                <a:spcPts val="1200"/>
+              </a:spcBef>
+            </a:pPr>
+            <a:r>
+              <a:rPr sz="1800" b="0" i="0">
+                <a:solidFill>
+                  <a:srgbClr val="FFFFFF"/>
+                </a:solidFill>
+                <a:latin typeface="Calibri"/>
+              </a:rPr>
+              <a:t>  •  1,655 lines from 1,419 compositions</a:t>
+            </a:r>
+          </a:p>
+          <a:p>
+            <a:pPr>
+              <a:spcBef>
+                <a:spcPts val="1200"/>
+              </a:spcBef>
+            </a:pPr>
+            <a:r>
+              <a:rPr sz="1800" b="0" i="0">
+                <a:solidFill>
+                  <a:srgbClr val="FFFFFF"/>
+                </a:solidFill>
+                <a:latin typeface="Calibri"/>
+              </a:rPr>
+              <a:t>  •  ~16× larger</a:t>
+            </a:r>
+          </a:p>
+          <a:p>
+            <a:pPr>
+              <a:spcBef>
+                <a:spcPts val="1200"/>
+              </a:spcBef>
+            </a:pPr>
+            <a:r>
+              <a:rPr sz="1800" b="0" i="0">
+                <a:solidFill>
+                  <a:srgbClr val="FFFFFF"/>
+                </a:solidFill>
+                <a:latin typeface="Calibri"/>
+              </a:rPr>
+              <a:t>  •  342 multi-part, 1,313 single-voice</a:t>
+            </a:r>
+          </a:p>
+        </p:txBody>
+      </p:sp>
+      <p:sp>
+        <p:nvSpPr>
+          <p:cNvPr id="8" name="TextBox 7"/>
           <p:cNvSpPr txBox="1"/>
           <p:nvPr/>
         </p:nvSpPr>
         <p:spPr>
           <a:xfrm>
-            <a:off x="685800" y="1371600"/>
-            <a:ext cx="10789920" cy="5029200"/>
+            <a:off x="502920" y="5943600"/>
+            <a:ext cx="11155680" cy="548640"/>
           </a:xfrm>
           <a:prstGeom prst="rect">
             <a:avLst/>
@@ -8807,75 +9668,20 @@
           <a:noFill/>
         </p:spPr>
         <p:txBody>
-          <a:bodyPr wrap="square">
+          <a:bodyPr wrap="none">
             <a:spAutoFit/>
           </a:bodyPr>
           <a:lstStyle/>
           <a:p>
-            <a:pPr algn="l">
-              <a:spcAft>
-                <a:spcPts val="800"/>
-              </a:spcAft>
-            </a:pPr>
-            <a:r>
-              <a:rPr sz="2200" b="0" i="0">
-                <a:solidFill>
-                  <a:srgbClr val="2D2D2D"/>
-                </a:solidFill>
-                <a:latin typeface="Calibri"/>
-              </a:rPr>
-              <a:t>  •  OpenScore Lieder Corpus (CC0, openly licensed)
-Real published scores: Schubert, Schumann, Debussy, Fauré, and more.</a:t>
-            </a:r>
-          </a:p>
-          <a:p>
-            <a:pPr algn="l">
-              <a:spcAft>
-                <a:spcPts val="800"/>
-              </a:spcAft>
-            </a:pPr>
-            <a:r>
-              <a:rPr sz="2200" b="0" i="0">
-                <a:solidFill>
-                  <a:srgbClr val="2D2D2D"/>
-                </a:solidFill>
-                <a:latin typeface="Calibri"/>
-              </a:rPr>
-              <a:t>  •  Experiment 1:  101 vocal lines (one per composition) — compact library.</a:t>
-            </a:r>
-          </a:p>
-          <a:p>
-            <a:pPr algn="l">
-              <a:spcAft>
-                <a:spcPts val="800"/>
-              </a:spcAft>
-            </a:pPr>
-            <a:r>
-              <a:rPr sz="2200" b="0" i="0">
-                <a:solidFill>
-                  <a:srgbClr val="2D2D2D"/>
-                </a:solidFill>
-                <a:latin typeface="Calibri"/>
-              </a:rPr>
-              <a:t>  •  Experiment 2:  1,655 vocal lines from 1,419 compositions (~16× larger).
-342 lines from multi-part works, 1,313 from single-voice songs.</a:t>
-            </a:r>
-          </a:p>
-          <a:p>
-            <a:pPr algn="l">
-              <a:spcAft>
-                <a:spcPts val="800"/>
-              </a:spcAft>
-            </a:pPr>
-            <a:r>
-              <a:rPr sz="2200" b="0" i="0">
-                <a:solidFill>
-                  <a:srgbClr val="2D2D2D"/>
-                </a:solidFill>
-                <a:latin typeface="Calibri"/>
-              </a:rPr>
-              <a:t>  •  These are not made-up examples —
-these are real art songs that singers perform every day.</a:t>
+            <a:pPr algn="ctr"/>
+            <a:r>
+              <a:rPr sz="1700" b="0" i="1">
+                <a:solidFill>
+                  <a:srgbClr val="2E4A7D"/>
+                </a:solidFill>
+                <a:latin typeface="Calibri"/>
+              </a:rPr>
+              <a:t>Multi-part works (e.g. duets): each vocal line is its own item.</a:t>
             </a:r>
           </a:p>
         </p:txBody>
@@ -8894,7 +9700,7 @@
     <p:bg>
       <p:bgPr>
         <a:solidFill>
-          <a:srgbClr val="FDF6EC"/>
+          <a:srgbClr val="FFFFFF"/>
         </a:solidFill>
         <a:effectLst/>
       </p:bgPr>
@@ -8921,7 +9727,7 @@
             <a:avLst/>
           </a:prstGeom>
           <a:solidFill>
-            <a:srgbClr val="6B1D2A"/>
+            <a:srgbClr val="0B1F3B"/>
           </a:solidFill>
           <a:ln>
             <a:noFill/>
@@ -8999,7 +9805,7 @@
             <a:avLst/>
           </a:prstGeom>
           <a:solidFill>
-            <a:srgbClr val="C59B3F"/>
+            <a:srgbClr val="FF5D7A"/>
           </a:solidFill>
           <a:ln>
             <a:noFill/>
@@ -9057,7 +9863,7 @@
             <a:r>
               <a:rPr sz="2200" b="0" i="0">
                 <a:solidFill>
-                  <a:srgbClr val="2D2D2D"/>
+                  <a:srgbClr val="1A1A1A"/>
                 </a:solidFill>
                 <a:latin typeface="Calibri"/>
               </a:rPr>
@@ -9073,12 +9879,12 @@
             <a:r>
               <a:rPr sz="2200" b="0" i="0">
                 <a:solidFill>
-                  <a:srgbClr val="2D2D2D"/>
-                </a:solidFill>
-                <a:latin typeface="Calibri"/>
-              </a:rPr>
-              <a:t>2.  Build a singer profile FROM that line’s own fingerprint
-     (range, top-4 favorite pitches, bottom-2 avoid pitches).</a:t>
+                  <a:srgbClr val="1A1A1A"/>
+                </a:solidFill>
+                <a:latin typeface="Calibri"/>
+              </a:rPr>
+              <a:t>2.  Build a singer profile from that line’s fingerprint
+     (range, top-4 favorites, bottom-2 avoids).</a:t>
             </a:r>
           </a:p>
           <a:p>
@@ -9090,12 +9896,11 @@
             <a:r>
               <a:rPr sz="2200" b="0" i="0">
                 <a:solidFill>
-                  <a:srgbClr val="2D2D2D"/>
-                </a:solidFill>
-                <a:latin typeface="Calibri"/>
-              </a:rPr>
-              <a:t>3.  Ask the system: can you find that same line among
-     hundreds of candidates?</a:t>
+                  <a:srgbClr val="1A1A1A"/>
+                </a:solidFill>
+                <a:latin typeface="Calibri"/>
+              </a:rPr>
+              <a:t>3.  Can the system find that line among all candidates?</a:t>
             </a:r>
           </a:p>
         </p:txBody>
@@ -9115,11 +9920,11 @@
             <a:avLst/>
           </a:prstGeom>
           <a:solidFill>
-            <a:srgbClr val="F5E6C4"/>
+            <a:srgbClr val="F4F6F8"/>
           </a:solidFill>
           <a:ln w="19050">
             <a:solidFill>
-              <a:srgbClr val="C59B3F"/>
+              <a:srgbClr val="FF5D7A"/>
             </a:solidFill>
           </a:ln>
         </p:spPr>
@@ -9145,66 +9950,44 @@
             <a:r>
               <a:rPr sz="2000" b="1" i="0">
                 <a:solidFill>
-                  <a:srgbClr val="2D2D2D"/>
-                </a:solidFill>
-                <a:latin typeface="Calibri"/>
-              </a:rPr>
-              <a:t>Three baselines compared:</a:t>
+                  <a:srgbClr val="1A1A1A"/>
+                </a:solidFill>
+                <a:latin typeface="Calibri"/>
+              </a:rPr>
+              <a:t>Three models compared:</a:t>
             </a:r>
           </a:p>
           <a:p>
             <a:r>
               <a:rPr sz="2000" b="0" i="0">
                 <a:solidFill>
-                  <a:srgbClr val="2D2D2D"/>
-                </a:solidFill>
-                <a:latin typeface="Calibri"/>
-              </a:rPr>
-              <a:t>Full model:  cosine similarity + avoid penalty (α = 0.5)</a:t>
+                  <a:srgbClr val="1A1A1A"/>
+                </a:solidFill>
+                <a:latin typeface="Calibri"/>
+              </a:rPr>
+              <a:t>Full model:  cosine + avoid penalty (α = 0.5)</a:t>
             </a:r>
           </a:p>
           <a:p>
             <a:r>
               <a:rPr sz="2000" b="0" i="0">
                 <a:solidFill>
-                  <a:srgbClr val="2D2D2D"/>
-                </a:solidFill>
-                <a:latin typeface="Calibri"/>
-              </a:rPr>
-              <a:t>Cosine-only:  similarity without the avoid penalty (α = 0)</a:t>
+                  <a:srgbClr val="1A1A1A"/>
+                </a:solidFill>
+                <a:latin typeface="Calibri"/>
+              </a:rPr>
+              <a:t>Cosine-only:  no avoid penalty (α = 0)</a:t>
             </a:r>
           </a:p>
           <a:p>
             <a:r>
               <a:rPr sz="2000" b="0" i="0">
                 <a:solidFill>
-                  <a:srgbClr val="2D2D2D"/>
-                </a:solidFill>
-                <a:latin typeface="Calibri"/>
-              </a:rPr>
-              <a:t>Null (random):  range filter only, then random ordering</a:t>
-            </a:r>
-          </a:p>
-          <a:p>
-            <a:r>
-              <a:rPr sz="2000" b="0" i="0">
-                <a:solidFill>
-                  <a:srgbClr val="2D2D2D"/>
-                </a:solidFill>
-                <a:latin typeface="Calibri"/>
-              </a:rPr>
-              <a:t/>
-            </a:r>
-          </a:p>
-          <a:p>
-            <a:r>
-              <a:rPr sz="2000" b="0" i="1">
-                <a:solidFill>
-                  <a:srgbClr val="6B1D2A"/>
-                </a:solidFill>
-                <a:latin typeface="Calibri"/>
-              </a:rPr>
-              <a:t>So what did we find?</a:t>
+                  <a:srgbClr val="1A1A1A"/>
+                </a:solidFill>
+                <a:latin typeface="Calibri"/>
+              </a:rPr>
+              <a:t>Null:  range filter → random order</a:t>
             </a:r>
           </a:p>
         </p:txBody>

--- a/CADSCOM_PRESENTATION/CADSCOM_2026_Presentation.pptx
+++ b/CADSCOM_PRESENTATION/CADSCOM_2026_Presentation.pptx
@@ -903,7 +903,7 @@
           <a:p/>
           <a:p>
             <a:r>
-              <a:t>Let me step back and talk about what this means in practice. This is a proof-of-concept showing that data science can bring objectivity to a domain where decisions are traditionally subjective -- and where bad decisions have real health consequences. Think about the practical impact for a voice teacher. Right now, they recommend pieces from their own training and experience. But a query based on specific pitches -- 'find me pieces that live on these notes and avoid those' -- is far more granular than Fach. It could surface a piece the teacher has never encountered that turns out to be a perfect fit for their student's unique voice. For those of you in CS and data science, this also demonstrates that familiar tools -- cosine similarity, content-based filtering, offline evaluation -- can work in a completely new domain, and in a cold-start setting with no collaborative signal. I think there is a broader takeaway here for anyone working with content-based recommendation: these familiar techniques can open up entirely new domains, and I would welcome a conversation about where else they might apply.</a:t>
+              <a:t>Let me step back and talk about what this means in practice. This is a proof-of-concept showing that data science can bring objectivity to a domain where decisions are traditionally subjective -- and where bad decisions have real health consequences. Think about the practical impact for a voice teacher. Right now, they recommend pieces from their own training and experience. But a query based on specific pitches -- 'find me pieces that live on these notes and avoid those' -- gives a different kind of information than Fach labels. It could surface a piece the teacher has never encountered that still looks like a strong fit on these pitch patterns for their student's unique voice. For those of you in CS and data science, this also demonstrates that familiar tools -- cosine similarity, content-based filtering, offline evaluation -- can work in a completely new domain, and in a cold-start setting with no collaborative signal. I think there is a broader takeaway here for anyone working with content-based recommendation: these familiar techniques can open up entirely new domains, and I would welcome a conversation about where else they might apply.</a:t>
             </a:r>
           </a:p>
         </p:txBody>
@@ -1459,7 +1459,7 @@
           <a:p/>
           <a:p>
             <a:r>
-              <a:t>The pipeline has five steps. The singer provides three inputs: their comfortable vocal range, favorite pitches, and pitches to avoid. We filter out any song whose written range goes beyond what the singer specified. Then we construct an ideal pitch profile from those preferences. Every pitch in the singer's range starts with a small base weight, favorite pitches get a large boost, and avoided pitches drop to zero. The result is a target fingerprint of what the perfect song would look like for that singer. We score every remaining song by how closely its tessituragram matches that ideal, minus a penalty for time on avoided pitches. Finally, we return a ranked list from best match to worst.</a:t>
+              <a:t>The pipeline has five steps. The singer provides three inputs: their comfortable vocal range, favorite pitches, and pitches to avoid. We filter out any song whose written range goes beyond what the singer specified. Then we build an ideal pitch profile from those inputs -- the next slide explains exactly how that profile is formed. We score every remaining song by how closely its tessituragram matches that ideal, minus a penalty for time on avoided pitches. Finally, we return a ranked list from best match to worst.</a:t>
             </a:r>
           </a:p>
         </p:txBody>
@@ -1535,7 +1535,7 @@
           <a:p/>
           <a:p>
             <a:r>
-              <a:t>Here is how the scoring works. First, recall how the ideal profile is built. We create a list of numbers -- one per pitch in the singer's range. Every pitch starts with a small base weight so it is not ignored entirely. Favorite pitches get a large boost on top of that, and avoided pitches are dropped to zero. The result is a profile that peaks at the singer's preferred pitches and has nothing where they want to avoid.</a:t>
+              <a:t>Here is how the scoring works. We create a list of numbers -- one per pitch in the singer's range. Every pitch starts with a small base weight so it is not ignored entirely. Favorite pitches get a large boost on top of that, and avoided pitches are dropped to zero. The result is a profile that peaks at the singer's preferred pitches and has nothing where they want to avoid.</a:t>
             </a:r>
           </a:p>
           <a:p/>
@@ -5330,30 +5330,373 @@
           </a:p>
         </p:txBody>
       </p:sp>
-      <p:pic>
-        <p:nvPicPr>
-          <p:cNvPr id="5" name="Picture 4" descr="RQ2_baselines.png"/>
-          <p:cNvPicPr>
-            <a:picLocks noChangeAspect="1"/>
-          </p:cNvPicPr>
+      <p:graphicFrame>
+        <p:nvGraphicFramePr>
+          <p:cNvPr id="5" name="Table 4"/>
+          <p:cNvGraphicFramePr>
+            <a:graphicFrameLocks noGrp="1"/>
+          </p:cNvGraphicFramePr>
           <p:nvPr/>
-        </p:nvPicPr>
-        <p:blipFill>
-          <a:blip r:embed="rId2"/>
-          <a:stretch>
-            <a:fillRect/>
-          </a:stretch>
-        </p:blipFill>
-        <p:spPr>
-          <a:xfrm>
-            <a:off x="3646455" y="1325880"/>
-            <a:ext cx="4898785" cy="3474720"/>
-          </a:xfrm>
-          <a:prstGeom prst="rect">
-            <a:avLst/>
-          </a:prstGeom>
-        </p:spPr>
-      </p:pic>
+        </p:nvGraphicFramePr>
+        <p:xfrm>
+          <a:off x="594360" y="1280160"/>
+          <a:ext cx="11018520" cy="3246120"/>
+        </p:xfrm>
+        <a:graphic>
+          <a:graphicData uri="http://schemas.openxmlformats.org/drawingml/2006/table">
+            <a:tbl>
+              <a:tblPr firstRow="1" bandRow="1">
+                <a:tableStyleId>{5C22544A-7EE6-4342-B048-85BDC9FD1C3A}</a:tableStyleId>
+              </a:tblPr>
+              <a:tblGrid>
+                <a:gridCol w="2148840"/>
+                <a:gridCol w="4434840"/>
+                <a:gridCol w="4434840"/>
+              </a:tblGrid>
+              <a:tr h="649224">
+                <a:tc rowSpan="2">
+                  <a:txBody>
+                    <a:bodyPr anchor="ctr" wrap="square" lIns="54864" rIns="54864"/>
+                    <a:lstStyle/>
+                    <a:p>
+                      <a:pPr algn="ctr"/>
+                      <a:r>
+                        <a:rPr sz="1300" b="1" i="0">
+                          <a:solidFill>
+                            <a:srgbClr val="FFFFFF"/>
+                          </a:solidFill>
+                          <a:latin typeface="Calibri"/>
+                        </a:rPr>
+                        <a:t>Model</a:t>
+                      </a:r>
+                    </a:p>
+                  </a:txBody>
+                  <a:tcPr>
+                    <a:solidFill>
+                      <a:srgbClr val="0B1F3B"/>
+                    </a:solidFill>
+                  </a:tcPr>
+                </a:tc>
+                <a:tc>
+                  <a:txBody>
+                    <a:bodyPr anchor="ctr" wrap="square" lIns="54864" rIns="54864"/>
+                    <a:lstStyle/>
+                    <a:p>
+                      <a:pPr algn="ctr"/>
+                      <a:r>
+                        <a:rPr sz="1200" b="1" i="0">
+                          <a:solidFill>
+                            <a:srgbClr val="FFFFFF"/>
+                          </a:solidFill>
+                          <a:latin typeface="Calibri"/>
+                        </a:rPr>
+                        <a:t>Experiment 1 (5 baselines, 130 perturbations)</a:t>
+                      </a:r>
+                    </a:p>
+                  </a:txBody>
+                  <a:tcPr>
+                    <a:solidFill>
+                      <a:srgbClr val="0B1F3B"/>
+                    </a:solidFill>
+                  </a:tcPr>
+                </a:tc>
+                <a:tc>
+                  <a:txBody>
+                    <a:bodyPr anchor="ctr" wrap="square" lIns="54864" rIns="54864"/>
+                    <a:lstStyle/>
+                    <a:p>
+                      <a:pPr algn="ctr"/>
+                      <a:r>
+                        <a:rPr sz="1200" b="1" i="0">
+                          <a:solidFill>
+                            <a:srgbClr val="FFFFFF"/>
+                          </a:solidFill>
+                          <a:latin typeface="Calibri"/>
+                        </a:rPr>
+                        <a:t>Experiment 2 (20 baselines, 580 perturbations)</a:t>
+                      </a:r>
+                    </a:p>
+                  </a:txBody>
+                  <a:tcPr>
+                    <a:solidFill>
+                      <a:srgbClr val="0B1F3B"/>
+                    </a:solidFill>
+                  </a:tcPr>
+                </a:tc>
+              </a:tr>
+              <a:tr h="649224">
+                <a:tc vMerge="1">
+                  <a:txBody>
+                    <a:bodyPr/>
+                    <a:lstStyle/>
+                    <a:p/>
+                  </a:txBody>
+                  <a:tcPr/>
+                </a:tc>
+                <a:tc>
+                  <a:txBody>
+                    <a:bodyPr anchor="ctr" wrap="square" lIns="54864" rIns="54864"/>
+                    <a:lstStyle/>
+                    <a:p>
+                      <a:pPr algn="ctr"/>
+                      <a:r>
+                        <a:rPr sz="1200" b="1" i="0">
+                          <a:solidFill>
+                            <a:srgbClr val="2E4A7D"/>
+                          </a:solidFill>
+                          <a:latin typeface="Calibri"/>
+                        </a:rPr>
+                        <a:t>Mean τ (95% CI)</a:t>
+                      </a:r>
+                    </a:p>
+                  </a:txBody>
+                  <a:tcPr>
+                    <a:solidFill>
+                      <a:srgbClr val="F4F6F8"/>
+                    </a:solidFill>
+                  </a:tcPr>
+                </a:tc>
+                <a:tc>
+                  <a:txBody>
+                    <a:bodyPr anchor="ctr" wrap="square" lIns="54864" rIns="54864"/>
+                    <a:lstStyle/>
+                    <a:p>
+                      <a:pPr algn="ctr"/>
+                      <a:r>
+                        <a:rPr sz="1200" b="1" i="0">
+                          <a:solidFill>
+                            <a:srgbClr val="2E4A7D"/>
+                          </a:solidFill>
+                          <a:latin typeface="Calibri"/>
+                        </a:rPr>
+                        <a:t>Mean τ (95% CI)</a:t>
+                      </a:r>
+                    </a:p>
+                  </a:txBody>
+                  <a:tcPr>
+                    <a:solidFill>
+                      <a:srgbClr val="F4F6F8"/>
+                    </a:solidFill>
+                  </a:tcPr>
+                </a:tc>
+              </a:tr>
+              <a:tr h="649224">
+                <a:tc>
+                  <a:txBody>
+                    <a:bodyPr anchor="ctr" wrap="square" lIns="54864" rIns="54864"/>
+                    <a:lstStyle/>
+                    <a:p>
+                      <a:pPr algn="l"/>
+                      <a:r>
+                        <a:rPr sz="1300" b="1" i="0">
+                          <a:solidFill>
+                            <a:srgbClr val="0B1F3B"/>
+                          </a:solidFill>
+                          <a:latin typeface="Calibri"/>
+                        </a:rPr>
+                        <a:t>Null (random)</a:t>
+                      </a:r>
+                    </a:p>
+                  </a:txBody>
+                  <a:tcPr>
+                    <a:solidFill>
+                      <a:srgbClr val="F4F6F8"/>
+                    </a:solidFill>
+                  </a:tcPr>
+                </a:tc>
+                <a:tc>
+                  <a:txBody>
+                    <a:bodyPr anchor="ctr" wrap="square" lIns="54864" rIns="54864"/>
+                    <a:lstStyle/>
+                    <a:p>
+                      <a:pPr algn="ctr"/>
+                      <a:r>
+                        <a:rPr sz="1300" b="0" i="0">
+                          <a:solidFill>
+                            <a:srgbClr val="1A1A1A"/>
+                          </a:solidFill>
+                          <a:latin typeface="Calibri"/>
+                        </a:rPr>
+                        <a:t>−0.04 [−0.05, −0.02]</a:t>
+                      </a:r>
+                    </a:p>
+                  </a:txBody>
+                  <a:tcPr>
+                    <a:solidFill>
+                      <a:srgbClr val="F4F6F8"/>
+                    </a:solidFill>
+                  </a:tcPr>
+                </a:tc>
+                <a:tc>
+                  <a:txBody>
+                    <a:bodyPr anchor="ctr" wrap="square" lIns="54864" rIns="54864"/>
+                    <a:lstStyle/>
+                    <a:p>
+                      <a:pPr algn="ctr"/>
+                      <a:r>
+                        <a:rPr sz="1300" b="0" i="0">
+                          <a:solidFill>
+                            <a:srgbClr val="1A1A1A"/>
+                          </a:solidFill>
+                          <a:latin typeface="Calibri"/>
+                        </a:rPr>
+                        <a:t>0.00 [−0.002, 0.007]</a:t>
+                      </a:r>
+                    </a:p>
+                  </a:txBody>
+                  <a:tcPr>
+                    <a:solidFill>
+                      <a:srgbClr val="F4F6F8"/>
+                    </a:solidFill>
+                  </a:tcPr>
+                </a:tc>
+              </a:tr>
+              <a:tr h="649224">
+                <a:tc>
+                  <a:txBody>
+                    <a:bodyPr anchor="ctr" wrap="square" lIns="54864" rIns="54864"/>
+                    <a:lstStyle/>
+                    <a:p>
+                      <a:pPr algn="l"/>
+                      <a:r>
+                        <a:rPr sz="1300" b="1" i="0">
+                          <a:solidFill>
+                            <a:srgbClr val="0B1F3B"/>
+                          </a:solidFill>
+                          <a:latin typeface="Calibri"/>
+                        </a:rPr>
+                        <a:t>Cosine-only (α = 0)</a:t>
+                      </a:r>
+                    </a:p>
+                  </a:txBody>
+                  <a:tcPr>
+                    <a:solidFill>
+                      <a:srgbClr val="FFFFFF"/>
+                    </a:solidFill>
+                  </a:tcPr>
+                </a:tc>
+                <a:tc>
+                  <a:txBody>
+                    <a:bodyPr anchor="ctr" wrap="square" lIns="54864" rIns="54864"/>
+                    <a:lstStyle/>
+                    <a:p>
+                      <a:pPr algn="ctr"/>
+                      <a:r>
+                        <a:rPr sz="1300" b="0" i="0">
+                          <a:solidFill>
+                            <a:srgbClr val="1A1A1A"/>
+                          </a:solidFill>
+                          <a:latin typeface="Calibri"/>
+                        </a:rPr>
+                        <a:t>0.87 [0.84, 0.91]</a:t>
+                      </a:r>
+                    </a:p>
+                  </a:txBody>
+                  <a:tcPr>
+                    <a:solidFill>
+                      <a:srgbClr val="FFFFFF"/>
+                    </a:solidFill>
+                  </a:tcPr>
+                </a:tc>
+                <a:tc>
+                  <a:txBody>
+                    <a:bodyPr anchor="ctr" wrap="square" lIns="54864" rIns="54864"/>
+                    <a:lstStyle/>
+                    <a:p>
+                      <a:pPr algn="ctr"/>
+                      <a:r>
+                        <a:rPr sz="1300" b="0" i="0">
+                          <a:solidFill>
+                            <a:srgbClr val="1A1A1A"/>
+                          </a:solidFill>
+                          <a:latin typeface="Calibri"/>
+                        </a:rPr>
+                        <a:t>0.87 [0.86, 0.88]</a:t>
+                      </a:r>
+                    </a:p>
+                  </a:txBody>
+                  <a:tcPr>
+                    <a:solidFill>
+                      <a:srgbClr val="FFFFFF"/>
+                    </a:solidFill>
+                  </a:tcPr>
+                </a:tc>
+              </a:tr>
+              <a:tr h="649224">
+                <a:tc>
+                  <a:txBody>
+                    <a:bodyPr anchor="ctr" wrap="square" lIns="54864" rIns="54864"/>
+                    <a:lstStyle/>
+                    <a:p>
+                      <a:pPr algn="l"/>
+                      <a:r>
+                        <a:rPr sz="1300" b="1" i="0">
+                          <a:solidFill>
+                            <a:srgbClr val="0B1F3B"/>
+                          </a:solidFill>
+                          <a:latin typeface="Calibri"/>
+                        </a:rPr>
+                        <a:t>Full (α = 0.5)</a:t>
+                      </a:r>
+                    </a:p>
+                  </a:txBody>
+                  <a:tcPr>
+                    <a:solidFill>
+                      <a:srgbClr val="F4F6F8"/>
+                    </a:solidFill>
+                  </a:tcPr>
+                </a:tc>
+                <a:tc>
+                  <a:txBody>
+                    <a:bodyPr anchor="ctr" wrap="square" lIns="54864" rIns="54864"/>
+                    <a:lstStyle/>
+                    <a:p>
+                      <a:pPr algn="ctr"/>
+                      <a:r>
+                        <a:rPr sz="1300" b="0" i="0">
+                          <a:solidFill>
+                            <a:srgbClr val="1A1A1A"/>
+                          </a:solidFill>
+                          <a:latin typeface="Calibri"/>
+                        </a:rPr>
+                        <a:t>0.85 [0.81, 0.88]</a:t>
+                      </a:r>
+                    </a:p>
+                  </a:txBody>
+                  <a:tcPr>
+                    <a:solidFill>
+                      <a:srgbClr val="F4F6F8"/>
+                    </a:solidFill>
+                  </a:tcPr>
+                </a:tc>
+                <a:tc>
+                  <a:txBody>
+                    <a:bodyPr anchor="ctr" wrap="square" lIns="54864" rIns="54864"/>
+                    <a:lstStyle/>
+                    <a:p>
+                      <a:pPr algn="ctr"/>
+                      <a:r>
+                        <a:rPr sz="1300" b="0" i="0">
+                          <a:solidFill>
+                            <a:srgbClr val="1A1A1A"/>
+                          </a:solidFill>
+                          <a:latin typeface="Calibri"/>
+                        </a:rPr>
+                        <a:t>0.84 [0.82, 0.85]</a:t>
+                      </a:r>
+                    </a:p>
+                  </a:txBody>
+                  <a:tcPr>
+                    <a:solidFill>
+                      <a:srgbClr val="F4F6F8"/>
+                    </a:solidFill>
+                  </a:tcPr>
+                </a:tc>
+              </a:tr>
+            </a:tbl>
+          </a:graphicData>
+        </a:graphic>
+      </p:graphicFrame>
       <p:sp>
         <p:nvSpPr>
           <p:cNvPr id="6" name="TextBox 5"/>
@@ -5362,8 +5705,8 @@
         </p:nvSpPr>
         <p:spPr>
           <a:xfrm>
-            <a:off x="685800" y="5029200"/>
-            <a:ext cx="10789920" cy="1645920"/>
+            <a:off x="502920" y="4645152"/>
+            <a:ext cx="11201400" cy="1051560"/>
           </a:xfrm>
           <a:prstGeom prst="rect">
             <a:avLst/>
@@ -5376,51 +5719,31 @@
           </a:bodyPr>
           <a:lstStyle/>
           <a:p>
-            <a:pPr algn="l">
-              <a:spcAft>
-                <a:spcPts val="800"/>
-              </a:spcAft>
-            </a:pPr>
-            <a:r>
-              <a:rPr sz="2000" b="0" i="0">
-                <a:solidFill>
-                  <a:srgbClr val="1A1A1A"/>
+            <a:pPr algn="l"/>
+            <a:r>
+              <a:rPr sz="1400" b="0" i="1">
+                <a:solidFill>
+                  <a:srgbClr val="2E4A7D"/>
                 </a:solidFill>
                 <a:latin typeface="Calibri"/>
               </a:rPr>
-              <a:t>  •  Mean Kendall’s τ = 0.84–0.85  (threshold = 0.7).</a:t>
+              <a:t>Table 2. Ranking stability: mean Kendall’s τ per baseline (95% CI). τ = 1 means identical order; τ near 0 means unrelated rankings.</a:t>
             </a:r>
           </a:p>
           <a:p>
             <a:pPr algn="l">
-              <a:spcAft>
+              <a:spcBef>
                 <a:spcPts val="800"/>
-              </a:spcAft>
+              </a:spcBef>
             </a:pPr>
             <a:r>
-              <a:rPr sz="2000" b="0" i="0">
+              <a:rPr sz="1500" b="1" i="0">
                 <a:solidFill>
                   <a:srgbClr val="1A1A1A"/>
                 </a:solidFill>
                 <a:latin typeface="Calibri"/>
               </a:rPr>
-              <a:t>  •  Small preference changes → small ranking changes.</a:t>
-            </a:r>
-          </a:p>
-          <a:p>
-            <a:pPr algn="l">
-              <a:spcAft>
-                <a:spcPts val="800"/>
-              </a:spcAft>
-            </a:pPr>
-            <a:r>
-              <a:rPr sz="2000" b="0" i="0">
-                <a:solidFill>
-                  <a:srgbClr val="1A1A1A"/>
-                </a:solidFill>
-                <a:latin typeface="Calibri"/>
-              </a:rPr>
-              <a:t>  •  Stable and trustworthy.</a:t>
+              <a:t>τ &gt; 0.7 indicates strong agreement (Kendall, 1948).</a:t>
             </a:r>
           </a:p>
         </p:txBody>
@@ -6101,8 +6424,8 @@
                 </a:solidFill>
                 <a:latin typeface="Calibri"/>
               </a:rPr>
-              <a:t>  •  Pitch-level queries surpass Fach —
-surface pieces a teacher may never find.</a:t>
+              <a:t>  •  Pitch-level queries give different
+information than broad labels like Fach.</a:t>
             </a:r>
           </a:p>
           <a:p>
@@ -9835,86 +10158,14 @@
       </p:sp>
       <p:sp>
         <p:nvSpPr>
-          <p:cNvPr id="5" name="TextBox 4"/>
-          <p:cNvSpPr txBox="1"/>
-          <p:nvPr/>
-        </p:nvSpPr>
-        <p:spPr>
-          <a:xfrm>
-            <a:off x="685800" y="1371600"/>
-            <a:ext cx="10789920" cy="2743200"/>
-          </a:xfrm>
-          <a:prstGeom prst="rect">
-            <a:avLst/>
-          </a:prstGeom>
-          <a:noFill/>
-        </p:spPr>
-        <p:txBody>
-          <a:bodyPr wrap="square">
-            <a:spAutoFit/>
-          </a:bodyPr>
-          <a:lstStyle/>
-          <a:p>
-            <a:pPr algn="l">
-              <a:spcAft>
-                <a:spcPts val="800"/>
-              </a:spcAft>
-            </a:pPr>
-            <a:r>
-              <a:rPr sz="2200" b="0" i="0">
-                <a:solidFill>
-                  <a:srgbClr val="1A1A1A"/>
-                </a:solidFill>
-                <a:latin typeface="Calibri"/>
-              </a:rPr>
-              <a:t>1.  Pick a vocal line from the library.</a:t>
-            </a:r>
-          </a:p>
-          <a:p>
-            <a:pPr algn="l">
-              <a:spcAft>
-                <a:spcPts val="800"/>
-              </a:spcAft>
-            </a:pPr>
-            <a:r>
-              <a:rPr sz="2200" b="0" i="0">
-                <a:solidFill>
-                  <a:srgbClr val="1A1A1A"/>
-                </a:solidFill>
-                <a:latin typeface="Calibri"/>
-              </a:rPr>
-              <a:t>2.  Build a singer profile from that line’s fingerprint
-     (range, top-4 favorites, bottom-2 avoids).</a:t>
-            </a:r>
-          </a:p>
-          <a:p>
-            <a:pPr algn="l">
-              <a:spcAft>
-                <a:spcPts val="800"/>
-              </a:spcAft>
-            </a:pPr>
-            <a:r>
-              <a:rPr sz="2200" b="0" i="0">
-                <a:solidFill>
-                  <a:srgbClr val="1A1A1A"/>
-                </a:solidFill>
-                <a:latin typeface="Calibri"/>
-              </a:rPr>
-              <a:t>3.  Can the system find that line among all candidates?</a:t>
-            </a:r>
-          </a:p>
-        </p:txBody>
-      </p:sp>
-      <p:sp>
-        <p:nvSpPr>
-          <p:cNvPr id="6" name="Rounded Rectangle 5"/>
+          <p:cNvPr id="5" name="Rounded Rectangle 4"/>
           <p:cNvSpPr/>
           <p:nvPr/>
         </p:nvSpPr>
         <p:spPr>
           <a:xfrm>
-            <a:off x="685800" y="4023360"/>
-            <a:ext cx="10789920" cy="1828800"/>
+            <a:off x="502920" y="1261872"/>
+            <a:ext cx="5417820" cy="5074920"/>
           </a:xfrm>
           <a:prstGeom prst="roundRect">
             <a:avLst/>
@@ -9922,9 +10173,9 @@
           <a:solidFill>
             <a:srgbClr val="F4F6F8"/>
           </a:solidFill>
-          <a:ln w="19050">
+          <a:ln w="27940">
             <a:solidFill>
-              <a:srgbClr val="FF5D7A"/>
+              <a:srgbClr val="3FA7A3"/>
             </a:solidFill>
           </a:ln>
         </p:spPr>
@@ -9943,51 +10194,168 @@
           </a:fontRef>
         </p:style>
         <p:txBody>
-          <a:bodyPr rtlCol="0" anchor="ctr" wrap="square" lIns="274320" tIns="182880"/>
-          <a:lstStyle/>
-          <a:p>
-            <a:pPr algn="ctr"/>
+          <a:bodyPr rtlCol="0" anchor="ctr" wrap="square" lIns="256032" rIns="237744" tIns="201168"/>
+          <a:lstStyle/>
+          <a:p>
+            <a:pPr algn="l"/>
             <a:r>
               <a:rPr sz="2000" b="1" i="0">
                 <a:solidFill>
-                  <a:srgbClr val="1A1A1A"/>
+                  <a:srgbClr val="0B1F3B"/>
                 </a:solidFill>
                 <a:latin typeface="Calibri"/>
               </a:rPr>
-              <a:t>Three models compared:</a:t>
-            </a:r>
-          </a:p>
-          <a:p>
-            <a:r>
-              <a:rPr sz="2000" b="0" i="0">
+              <a:t>Synthetic self-retrieval</a:t>
+            </a:r>
+          </a:p>
+          <a:p>
+            <a:pPr algn="l">
+              <a:spcBef>
+                <a:spcPts val="1400"/>
+              </a:spcBef>
+            </a:pPr>
+            <a:r>
+              <a:rPr sz="1700" b="0" i="0">
                 <a:solidFill>
                   <a:srgbClr val="1A1A1A"/>
                 </a:solidFill>
                 <a:latin typeface="Calibri"/>
               </a:rPr>
-              <a:t>Full model:  cosine + avoid penalty (α = 0.5)</a:t>
-            </a:r>
-          </a:p>
-          <a:p>
-            <a:r>
-              <a:rPr sz="2000" b="0" i="0">
+              <a:t>  •  Pick a vocal line from the library.</a:t>
+            </a:r>
+          </a:p>
+          <a:p>
+            <a:pPr algn="l">
+              <a:spcBef>
+                <a:spcPts val="1400"/>
+              </a:spcBef>
+            </a:pPr>
+            <a:r>
+              <a:rPr sz="1700" b="0" i="0">
                 <a:solidFill>
                   <a:srgbClr val="1A1A1A"/>
                 </a:solidFill>
                 <a:latin typeface="Calibri"/>
               </a:rPr>
-              <a:t>Cosine-only:  no avoid penalty (α = 0)</a:t>
-            </a:r>
-          </a:p>
-          <a:p>
-            <a:r>
-              <a:rPr sz="2000" b="0" i="0">
+              <a:t>  •  Build a singer profile from that line’s tessituragram (range, top-4 favorites, bottom-2 avoids).</a:t>
+            </a:r>
+          </a:p>
+          <a:p>
+            <a:pPr algn="l">
+              <a:spcBef>
+                <a:spcPts val="1400"/>
+              </a:spcBef>
+            </a:pPr>
+            <a:r>
+              <a:rPr sz="1700" b="0" i="0">
                 <a:solidFill>
                   <a:srgbClr val="1A1A1A"/>
                 </a:solidFill>
                 <a:latin typeface="Calibri"/>
               </a:rPr>
-              <a:t>Null:  range filter → random order</a:t>
+              <a:t>  •  Rank all other candidates — does the same line rank first?</a:t>
+            </a:r>
+          </a:p>
+        </p:txBody>
+      </p:sp>
+      <p:sp>
+        <p:nvSpPr>
+          <p:cNvPr id="6" name="Rounded Rectangle 5"/>
+          <p:cNvSpPr/>
+          <p:nvPr/>
+        </p:nvSpPr>
+        <p:spPr>
+          <a:xfrm>
+            <a:off x="6240780" y="1261872"/>
+            <a:ext cx="5417820" cy="5074920"/>
+          </a:xfrm>
+          <a:prstGeom prst="roundRect">
+            <a:avLst/>
+          </a:prstGeom>
+          <a:solidFill>
+            <a:srgbClr val="F4F6F8"/>
+          </a:solidFill>
+          <a:ln w="27940">
+            <a:solidFill>
+              <a:srgbClr val="2E4A7D"/>
+            </a:solidFill>
+          </a:ln>
+        </p:spPr>
+        <p:style>
+          <a:lnRef idx="1">
+            <a:schemeClr val="accent1"/>
+          </a:lnRef>
+          <a:fillRef idx="3">
+            <a:schemeClr val="accent1"/>
+          </a:fillRef>
+          <a:effectRef idx="2">
+            <a:schemeClr val="accent1"/>
+          </a:effectRef>
+          <a:fontRef idx="minor">
+            <a:schemeClr val="lt1"/>
+          </a:fontRef>
+        </p:style>
+        <p:txBody>
+          <a:bodyPr rtlCol="0" anchor="ctr" wrap="square" lIns="256032" rIns="237744" tIns="201168"/>
+          <a:lstStyle/>
+          <a:p>
+            <a:pPr algn="l"/>
+            <a:r>
+              <a:rPr sz="2000" b="1" i="0">
+                <a:solidFill>
+                  <a:srgbClr val="0B1F3B"/>
+                </a:solidFill>
+                <a:latin typeface="Calibri"/>
+              </a:rPr>
+              <a:t>Three models compared</a:t>
+            </a:r>
+          </a:p>
+          <a:p>
+            <a:pPr algn="l">
+              <a:spcBef>
+                <a:spcPts val="1400"/>
+              </a:spcBef>
+            </a:pPr>
+            <a:r>
+              <a:rPr sz="1700" b="0" i="0">
+                <a:solidFill>
+                  <a:srgbClr val="1A1A1A"/>
+                </a:solidFill>
+                <a:latin typeface="Calibri"/>
+              </a:rPr>
+              <a:t>  •  Full:  cosine similarity + avoid penalty (α = 0.5).</a:t>
+            </a:r>
+          </a:p>
+          <a:p>
+            <a:pPr algn="l">
+              <a:spcBef>
+                <a:spcPts val="1400"/>
+              </a:spcBef>
+            </a:pPr>
+            <a:r>
+              <a:rPr sz="1700" b="0" i="0">
+                <a:solidFill>
+                  <a:srgbClr val="1A1A1A"/>
+                </a:solidFill>
+                <a:latin typeface="Calibri"/>
+              </a:rPr>
+              <a:t>  •  Cosine-only:  similarity without the avoid penalty (α = 0).</a:t>
+            </a:r>
+          </a:p>
+          <a:p>
+            <a:pPr algn="l">
+              <a:spcBef>
+                <a:spcPts val="1400"/>
+              </a:spcBef>
+            </a:pPr>
+            <a:r>
+              <a:rPr sz="1700" b="0" i="0">
+                <a:solidFill>
+                  <a:srgbClr val="1A1A1A"/>
+                </a:solidFill>
+                <a:latin typeface="Calibri"/>
+              </a:rPr>
+              <a:t>  •  Null:  range filter, then random ordering.</a:t>
             </a:r>
           </a:p>
         </p:txBody>
